--- a/lecons/F5/12_F5_M1_L11_Air_and_Water_Transport.pptx
+++ b/lecons/F5/12_F5_M1_L11_Air_and_Water_Transport.pptx
@@ -13421,7 +13421,7 @@
               <a:buNone/>
             </a:pPr>
             <a:r>
-              <a:rPr lang="en-US" sz="4000" b="1" dirty="0">
+              <a:rPr lang="en-US" sz="3200" b="1" dirty="0">
                 <a:solidFill>
                   <a:srgbClr val="111111"/>
                 </a:solidFill>
@@ -13431,7 +13431,7 @@
               </a:rPr>
               <a:t>Topic: Managing Resources for Development through Economic Activities</a:t>
             </a:r>
-            <a:endParaRPr lang="en-US" sz="4000" dirty="0"/>
+            <a:endParaRPr lang="en-US" sz="3200" dirty="0"/>
           </a:p>
           <a:p>
             <a:pPr algn="l" indent="0" marL="0">
@@ -13441,7 +13441,7 @@
               <a:buNone/>
             </a:pPr>
             <a:r>
-              <a:rPr lang="en-US" sz="4000" b="1" dirty="0">
+              <a:rPr lang="en-US" sz="3200" b="1" dirty="0">
                 <a:solidFill>
                   <a:srgbClr val="111111"/>
                 </a:solidFill>
@@ -13451,7 +13451,7 @@
               </a:rPr>
               <a:t>Sub-topic: World Communication</a:t>
             </a:r>
-            <a:endParaRPr lang="en-US" sz="4000" dirty="0"/>
+            <a:endParaRPr lang="en-US" sz="3200" dirty="0"/>
           </a:p>
           <a:p>
             <a:pPr algn="l" indent="0" marL="0">
@@ -13461,7 +13461,7 @@
               <a:buNone/>
             </a:pPr>
             <a:r>
-              <a:rPr lang="en-US" sz="4000" b="1" dirty="0">
+              <a:rPr lang="en-US" sz="3200" b="1" dirty="0">
                 <a:solidFill>
                   <a:srgbClr val="990011"/>
                 </a:solidFill>
@@ -13471,7 +13471,7 @@
               </a:rPr>
               <a:t>Lesson 11: Air and Water Transport</a:t>
             </a:r>
-            <a:endParaRPr lang="en-US" sz="4000" dirty="0"/>
+            <a:endParaRPr lang="en-US" sz="3200" dirty="0"/>
           </a:p>
         </p:txBody>
       </p:sp>

--- a/lecons/F5/12_F5_M1_L11_Air_and_Water_Transport.pptx
+++ b/lecons/F5/12_F5_M1_L11_Air_and_Water_Transport.pptx
@@ -58,9 +58,10 @@
     <p:sldId id="306" r:id="rId52"/>
     <p:sldId id="307" r:id="rId53"/>
     <p:sldId id="308" r:id="rId54"/>
+    <p:sldId id="309" r:id="rId55"/>
   </p:sldIdLst>
   <p:notesMasterIdLst>
-    <p:notesMasterId r:id="rId55"/>
+    <p:notesMasterId r:id="rId56"/>
   </p:notesMasterIdLst>
   <p:sldSz cx="12192000" cy="6858000"/>
   <p:notesSz cx="6858000" cy="12192000"/>
@@ -3370,7 +3371,7 @@
           <a:p>
             <a:r>
               <a:rPr lang="en-US" dirty="0"/>
-              <a:t>Let us copy Advantages, Disadvantages and Impact. Air and water transport have the following effects. On this slide we have Water transport and Air transport. Write each point on a new line, with the key term first, and explain it in your own words when we revise. When you finish, we go to the next slide.</a:t>
+              <a:t>Let us copy Advantages and Disadvantages. Water and air transport have the following advantages and disadvantages. On this slide we have Water transport and Air transport. Write each point on a new line, with the key term first, and explain it in your own words when we revise.</a:t>
             </a:r>
             <a:endParaRPr lang="en-US" dirty="0"/>
           </a:p>
@@ -3546,7 +3547,7 @@
           <a:p>
             <a:r>
               <a:rPr lang="en-US" dirty="0"/>
-              <a:t>We continue with Advantages, Disadvantages and Impact. On this slide we have Impact on the economy and Recent developments. Write each point on a new line, with the key term first, and explain it in your own words when we revise.</a:t>
+              <a:t>Let us copy Impact and Recent Developments. Water and air transport have the following impact and developments. On this slide we have Jobs and Trade and tourism. Write each point on a new line, with the key term first, and explain it in your own words when we revise. When you finish, we go to the next slide.</a:t>
             </a:r>
             <a:endParaRPr lang="en-US" dirty="0"/>
           </a:p>
@@ -3634,7 +3635,7 @@
           <a:p>
             <a:r>
               <a:rPr lang="en-US" dirty="0"/>
-              <a:t>Now draw this illustration in your notebook: modes of transport. Give it a title and label it clearly.</a:t>
+              <a:t>We continue with Impact and Recent Developments. On this slide we have Recent developments. Write each point on a new line, with the key term first, and explain it in your own words when we revise.</a:t>
             </a:r>
             <a:endParaRPr lang="en-US" dirty="0"/>
           </a:p>
@@ -3722,7 +3723,7 @@
           <a:p>
             <a:r>
               <a:rPr lang="en-US" dirty="0"/>
-              <a:t>Now let us check what you have understood. Question 1: Give two types of ships. Answer in your exercise book.</a:t>
+              <a:t>Now draw this illustration in your notebook: modes of transport. Give it a title and label it clearly.</a:t>
             </a:r>
             <a:endParaRPr lang="en-US" dirty="0"/>
           </a:p>
@@ -3810,7 +3811,7 @@
           <a:p>
             <a:r>
               <a:rPr lang="en-US" dirty="0"/>
-              <a:t>The expected answer is: tankers and container ships. If you got it right, well done.</a:t>
+              <a:t>Now let us check what you have understood. Question 1: Give two types of ships. Answer in your exercise book.</a:t>
             </a:r>
             <a:endParaRPr lang="en-US" dirty="0"/>
           </a:p>
@@ -3898,7 +3899,7 @@
           <a:p>
             <a:r>
               <a:rPr lang="en-US" dirty="0"/>
-              <a:t>Now let us check what you have understood. Question 2: Give one advantage and one disadvantage of air transport. Answer in your exercise book.</a:t>
+              <a:t>The expected answer is: tankers and container ships. If you got it right, well done.</a:t>
             </a:r>
             <a:endParaRPr lang="en-US" dirty="0"/>
           </a:p>
@@ -3986,7 +3987,7 @@
           <a:p>
             <a:r>
               <a:rPr lang="en-US" dirty="0"/>
-              <a:t>The expected answer is: fast; very costly. If you got it right, well done.</a:t>
+              <a:t>Now let us check what you have understood. Question 2: Give one advantage and one disadvantage of air transport. Answer in your exercise book.</a:t>
             </a:r>
             <a:endParaRPr lang="en-US" dirty="0"/>
           </a:p>
@@ -4074,7 +4075,7 @@
           <a:p>
             <a:r>
               <a:rPr lang="en-US" dirty="0"/>
-              <a:t>For those who need more practice, fill in the blanks in your exercise book. The answers are: number 1, tanker; number 2, liner; number 3, air.</a:t>
+              <a:t>The expected answer is: fast; very costly. If you got it right, well done.</a:t>
             </a:r>
             <a:endParaRPr lang="en-US" dirty="0"/>
           </a:p>
@@ -4162,7 +4163,7 @@
           <a:p>
             <a:r>
               <a:rPr lang="en-US" dirty="0"/>
-              <a:t>For your homework: Name the seaports and international airports of Cameroon. We shall correct it at the beginning of our next lesson.</a:t>
+              <a:t>For those who need more practice, fill in the blanks in your exercise book. The answers are: number 1, tanker; number 2, liner; number 3, air.</a:t>
             </a:r>
             <a:endParaRPr lang="en-US" dirty="0"/>
           </a:p>
@@ -4250,7 +4251,7 @@
           <a:p>
             <a:r>
               <a:rPr lang="en-US" dirty="0"/>
-              <a:t>Our next lesson will be on Further Study 2: Containerisation. Thank you for your attention, and see you next time.</a:t>
+              <a:t>For your homework: Name the seaports and international airports of Cameroon. We shall correct it at the beginning of our next lesson.</a:t>
             </a:r>
             <a:endParaRPr lang="en-US" dirty="0"/>
           </a:p>
@@ -4338,7 +4339,7 @@
           <a:p>
             <a:r>
               <a:rPr lang="en-US" dirty="0"/>
-              <a:t>Let us play the bilingual game. I say a word in English, and you give me the French word. Then we do the reverse.</a:t>
+              <a:t>Our next lesson will be on Further Study 2: Containerisation. Thank you for your attention, and see you next time.</a:t>
             </a:r>
             <a:endParaRPr lang="en-US" dirty="0"/>
           </a:p>
@@ -4514,7 +4515,7 @@
           <a:p>
             <a:r>
               <a:rPr lang="en-US" dirty="0"/>
-              <a:t>I record this information in the official logbook of the class after the lesson.</a:t>
+              <a:t>Let us play the bilingual game. I say a word in English, and you give me the French word. Then we do the reverse.</a:t>
             </a:r>
             <a:endParaRPr lang="en-US" dirty="0"/>
           </a:p>
@@ -4602,7 +4603,7 @@
           <a:p>
             <a:r>
               <a:rPr lang="en-US" dirty="0"/>
-              <a:t>I complete the second page of the logbook: the matter taught, the evaluation, the homework and the attendance.</a:t>
+              <a:t>I record this information in the official logbook of the class after the lesson.</a:t>
             </a:r>
             <a:endParaRPr lang="en-US" dirty="0"/>
           </a:p>
@@ -4690,7 +4691,7 @@
           <a:p>
             <a:r>
               <a:rPr lang="en-US" dirty="0"/>
-              <a:t>This slide is for me, the teacher: it gives the timing of the lesson and what to do if the projector is not available.</a:t>
+              <a:t>I complete the second page of the logbook: the matter taught, the evaluation, the homework and the attendance.</a:t>
             </a:r>
             <a:endParaRPr lang="en-US" dirty="0"/>
           </a:p>
@@ -4778,7 +4779,7 @@
           <a:p>
             <a:r>
               <a:rPr lang="en-US" dirty="0"/>
-              <a:t>These are the references and picture credits used to prepare this lesson.</a:t>
+              <a:t>This slide is for me, the teacher: it gives the timing of the lesson and what to do if the projector is not available.</a:t>
             </a:r>
             <a:endParaRPr lang="en-US" dirty="0"/>
           </a:p>
@@ -4802,6 +4803,94 @@
             <a:fld id="{F7021451-1387-4CA6-816F-3879F97B5CBC}" type="slidenum">
               <a:rPr lang="en-US"/>
               <a:t>53</a:t>
+            </a:fld>
+            <a:endParaRPr lang="en-US"/>
+          </a:p>
+        </p:txBody>
+      </p:sp>
+    </p:spTree>
+    <p:extLst>
+      <p:ext uri="{BB962C8B-B14F-4D97-AF65-F5344CB8AC3E}">
+        <p14:creationId xmlns:p14="http://schemas.microsoft.com/office/powerpoint/2010/main" val="1024086991"/>
+      </p:ext>
+    </p:extLst>
+  </p:cSld>
+  <p:clrMapOvr>
+    <a:masterClrMapping/>
+  </p:clrMapOvr>
+</p:notes>
+</file>
+
+<file path=ppt/notesSlides/notesSlide54.xml><?xml version="1.0" encoding="utf-8"?>
+<p:notes xmlns:a="http://schemas.openxmlformats.org/drawingml/2006/main" xmlns:r="http://schemas.openxmlformats.org/officeDocument/2006/relationships" xmlns:p="http://schemas.openxmlformats.org/presentationml/2006/main">
+  <p:cSld>
+    <p:spTree>
+      <p:nvGrpSpPr>
+        <p:cNvPr id="1" name=""/>
+        <p:cNvGrpSpPr/>
+        <p:nvPr/>
+      </p:nvGrpSpPr>
+      <p:grpSpPr>
+        <a:xfrm>
+          <a:off x="0" y="0"/>
+          <a:ext cx="0" cy="0"/>
+          <a:chOff x="0" y="0"/>
+          <a:chExt cx="0" cy="0"/>
+        </a:xfrm>
+      </p:grpSpPr>
+      <p:sp>
+        <p:nvSpPr>
+          <p:cNvPr id="2" name="Slide Image Placeholder 1"/>
+          <p:cNvSpPr>
+            <a:spLocks noGrp="1" noRot="1" noChangeAspect="1"/>
+          </p:cNvSpPr>
+          <p:nvPr>
+            <p:ph type="sldImg"/>
+          </p:nvPr>
+        </p:nvSpPr>
+        <p:spPr/>
+      </p:sp>
+      <p:sp>
+        <p:nvSpPr>
+          <p:cNvPr id="3" name="Notes Placeholder 2"/>
+          <p:cNvSpPr>
+            <a:spLocks noGrp="1"/>
+          </p:cNvSpPr>
+          <p:nvPr>
+            <p:ph type="body" idx="1"/>
+          </p:nvPr>
+        </p:nvSpPr>
+        <p:spPr/>
+        <p:txBody>
+          <a:bodyPr/>
+          <a:lstStyle/>
+          <a:p>
+            <a:r>
+              <a:rPr lang="en-US" dirty="0"/>
+              <a:t>These are the references and picture credits used to prepare this lesson.</a:t>
+            </a:r>
+            <a:endParaRPr lang="en-US" dirty="0"/>
+          </a:p>
+        </p:txBody>
+      </p:sp>
+      <p:sp>
+        <p:nvSpPr>
+          <p:cNvPr id="4" name="Slide Number Placeholder 3"/>
+          <p:cNvSpPr>
+            <a:spLocks noGrp="1"/>
+          </p:cNvSpPr>
+          <p:nvPr>
+            <p:ph type="sldNum" sz="quarter" idx="10"/>
+          </p:nvPr>
+        </p:nvSpPr>
+        <p:spPr/>
+        <p:txBody>
+          <a:bodyPr/>
+          <a:lstStyle/>
+          <a:p>
+            <a:fld id="{F7021451-1387-4CA6-816F-3879F97B5CBC}" type="slidenum">
+              <a:rPr lang="en-US"/>
+              <a:t>54</a:t>
             </a:fld>
             <a:endParaRPr lang="en-US"/>
           </a:p>
@@ -14662,7 +14751,7 @@
         <p:spPr>
           <a:xfrm>
             <a:off x="0" y="658368"/>
-            <a:ext cx="5120640" cy="5833872"/>
+            <a:ext cx="2468880" cy="5833872"/>
           </a:xfrm>
           <a:prstGeom prst="rect">
             <a:avLst/>
@@ -14677,8 +14766,8 @@
         </p:nvSpPr>
         <p:spPr>
           <a:xfrm>
-            <a:off x="5349240" y="1005840"/>
-            <a:ext cx="6522415" cy="731520"/>
+            <a:off x="2697480" y="1005840"/>
+            <a:ext cx="9174175" cy="731520"/>
           </a:xfrm>
           <a:prstGeom prst="rect">
             <a:avLst/>
@@ -14718,8 +14807,47 @@
         </p:nvSpPr>
         <p:spPr>
           <a:xfrm>
-            <a:off x="5349240" y="1783080"/>
-            <a:ext cx="6522415" cy="4663440"/>
+            <a:off x="2697480" y="1737360"/>
+            <a:ext cx="9174175" cy="457200"/>
+          </a:xfrm>
+          <a:prstGeom prst="rect">
+            <a:avLst/>
+          </a:prstGeom>
+          <a:noFill/>
+          <a:ln/>
+        </p:spPr>
+        <p:txBody>
+          <a:bodyPr wrap="square" lIns="0" tIns="0" rIns="0" bIns="0" rtlCol="0" anchor="ctr"/>
+          <a:lstStyle/>
+          <a:p>
+            <a:pPr algn="l" indent="0" marL="0">
+              <a:buNone/>
+            </a:pPr>
+            <a:r>
+              <a:rPr lang="en-US" sz="3200" b="1" dirty="0">
+                <a:solidFill>
+                  <a:srgbClr val="990011"/>
+                </a:solidFill>
+                <a:latin typeface="Times New Roman" pitchFamily="34" charset="0"/>
+                <a:ea typeface="Times New Roman" pitchFamily="34" charset="-122"/>
+                <a:cs typeface="Times New Roman" pitchFamily="34" charset="-120"/>
+              </a:rPr>
+              <a:t>A) Advantages and Disadvantages</a:t>
+            </a:r>
+            <a:endParaRPr lang="en-US" sz="3200" dirty="0"/>
+          </a:p>
+        </p:txBody>
+      </p:sp>
+      <p:sp>
+        <p:nvSpPr>
+          <p:cNvPr id="6" name="Text 3"/>
+          <p:cNvSpPr/>
+          <p:nvPr/>
+        </p:nvSpPr>
+        <p:spPr>
+          <a:xfrm>
+            <a:off x="2697480" y="2240280"/>
+            <a:ext cx="9174175" cy="4206240"/>
           </a:xfrm>
           <a:prstGeom prst="rect">
             <a:avLst/>
@@ -14746,7 +14874,7 @@
                 <a:ea typeface="Times New Roman" pitchFamily="34" charset="-122"/>
                 <a:cs typeface="Times New Roman" pitchFamily="34" charset="-120"/>
               </a:rPr>
-              <a:t>Air and water transport have the following effects:</a:t>
+              <a:t>Water and air transport have the following advantages and disadvantages:</a:t>
             </a:r>
             <a:endParaRPr lang="en-US" sz="4000" dirty="0"/>
           </a:p>
@@ -15194,7 +15322,7 @@
         <p:spPr>
           <a:xfrm>
             <a:off x="0" y="658368"/>
-            <a:ext cx="5120640" cy="5833872"/>
+            <a:ext cx="3840480" cy="5833872"/>
           </a:xfrm>
           <a:prstGeom prst="rect">
             <a:avLst/>
@@ -15209,8 +15337,8 @@
         </p:nvSpPr>
         <p:spPr>
           <a:xfrm>
-            <a:off x="5349240" y="1005840"/>
-            <a:ext cx="6522415" cy="731520"/>
+            <a:off x="4069080" y="1005840"/>
+            <a:ext cx="7802575" cy="731520"/>
           </a:xfrm>
           <a:prstGeom prst="rect">
             <a:avLst/>
@@ -15236,7 +15364,7 @@
                 <a:ea typeface="Times New Roman" pitchFamily="34" charset="-122"/>
                 <a:cs typeface="Times New Roman" pitchFamily="34" charset="-120"/>
               </a:rPr>
-              <a:t>3. Advantages, Disadvantages and Impact (continued)</a:t>
+              <a:t>3. Advantages, Disadvantages and Impact</a:t>
             </a:r>
             <a:endParaRPr lang="en-US" sz="3600" dirty="0"/>
           </a:p>
@@ -15250,8 +15378,47 @@
         </p:nvSpPr>
         <p:spPr>
           <a:xfrm>
-            <a:off x="5349240" y="1783080"/>
-            <a:ext cx="6522415" cy="4663440"/>
+            <a:off x="4069080" y="1737360"/>
+            <a:ext cx="7802575" cy="457200"/>
+          </a:xfrm>
+          <a:prstGeom prst="rect">
+            <a:avLst/>
+          </a:prstGeom>
+          <a:noFill/>
+          <a:ln/>
+        </p:spPr>
+        <p:txBody>
+          <a:bodyPr wrap="square" lIns="0" tIns="0" rIns="0" bIns="0" rtlCol="0" anchor="ctr"/>
+          <a:lstStyle/>
+          <a:p>
+            <a:pPr algn="l" indent="0" marL="0">
+              <a:buNone/>
+            </a:pPr>
+            <a:r>
+              <a:rPr lang="en-US" sz="3200" b="1" dirty="0">
+                <a:solidFill>
+                  <a:srgbClr val="990011"/>
+                </a:solidFill>
+                <a:latin typeface="Times New Roman" pitchFamily="34" charset="0"/>
+                <a:ea typeface="Times New Roman" pitchFamily="34" charset="-122"/>
+                <a:cs typeface="Times New Roman" pitchFamily="34" charset="-120"/>
+              </a:rPr>
+              <a:t>B) Impact and Recent Developments</a:t>
+            </a:r>
+            <a:endParaRPr lang="en-US" sz="3200" dirty="0"/>
+          </a:p>
+        </p:txBody>
+      </p:sp>
+      <p:sp>
+        <p:nvSpPr>
+          <p:cNvPr id="6" name="Text 3"/>
+          <p:cNvSpPr/>
+          <p:nvPr/>
+        </p:nvSpPr>
+        <p:spPr>
+          <a:xfrm>
+            <a:off x="4069080" y="2240280"/>
+            <a:ext cx="7802575" cy="4206240"/>
           </a:xfrm>
           <a:prstGeom prst="rect">
             <a:avLst/>
@@ -15270,7 +15437,7 @@
               <a:buNone/>
             </a:pPr>
             <a:r>
-              <a:rPr lang="en-US" sz="4000" b="1" dirty="0">
+              <a:rPr lang="en-US" sz="4000" i="1" dirty="0">
                 <a:solidFill>
                   <a:srgbClr val="111111"/>
                 </a:solidFill>
@@ -15278,8 +15445,11 @@
                 <a:ea typeface="Times New Roman" pitchFamily="34" charset="-122"/>
                 <a:cs typeface="Times New Roman" pitchFamily="34" charset="-120"/>
               </a:rPr>
-              <a:t>Impact on the economy: </a:t>
-            </a:r>
+              <a:t>Water and air transport have the following impact and developments:</a:t>
+            </a:r>
+            <a:endParaRPr lang="en-US" sz="4000" dirty="0"/>
+          </a:p>
+          <a:p>
             <a:pPr algn="l" indent="0" marL="0">
               <a:spcAft>
                 <a:spcPts val="800"/>
@@ -15287,7 +15457,7 @@
               <a:buNone/>
             </a:pPr>
             <a:r>
-              <a:rPr lang="en-US" sz="4000" dirty="0">
+              <a:rPr lang="en-US" sz="4000" b="1" dirty="0">
                 <a:solidFill>
                   <a:srgbClr val="111111"/>
                 </a:solidFill>
@@ -15295,11 +15465,8 @@
                 <a:ea typeface="Times New Roman" pitchFamily="34" charset="-122"/>
                 <a:cs typeface="Times New Roman" pitchFamily="34" charset="-120"/>
               </a:rPr>
-              <a:t>Ports and airports create jobs, trade and tourism.</a:t>
-            </a:r>
-            <a:endParaRPr lang="en-US" sz="4000" dirty="0"/>
-          </a:p>
-          <a:p>
+              <a:t>Jobs: </a:t>
+            </a:r>
             <a:pPr algn="l" indent="0" marL="0">
               <a:spcAft>
                 <a:spcPts val="800"/>
@@ -15307,7 +15474,7 @@
               <a:buNone/>
             </a:pPr>
             <a:r>
-              <a:rPr lang="en-US" sz="4000" b="1" dirty="0">
+              <a:rPr lang="en-US" sz="4000" dirty="0">
                 <a:solidFill>
                   <a:srgbClr val="111111"/>
                 </a:solidFill>
@@ -15315,8 +15482,11 @@
                 <a:ea typeface="Times New Roman" pitchFamily="34" charset="-122"/>
                 <a:cs typeface="Times New Roman" pitchFamily="34" charset="-120"/>
               </a:rPr>
-              <a:t>Recent developments: </a:t>
-            </a:r>
+              <a:t>Ports and airports employ many workers.</a:t>
+            </a:r>
+            <a:endParaRPr lang="en-US" sz="4000" dirty="0"/>
+          </a:p>
+          <a:p>
             <a:pPr algn="l" indent="0" marL="0">
               <a:spcAft>
                 <a:spcPts val="800"/>
@@ -15324,7 +15494,7 @@
               <a:buNone/>
             </a:pPr>
             <a:r>
-              <a:rPr lang="en-US" sz="4000" dirty="0">
+              <a:rPr lang="en-US" sz="4000" b="1" dirty="0">
                 <a:solidFill>
                   <a:srgbClr val="111111"/>
                 </a:solidFill>
@@ -15332,7 +15502,24 @@
                 <a:ea typeface="Times New Roman" pitchFamily="34" charset="-122"/>
                 <a:cs typeface="Times New Roman" pitchFamily="34" charset="-120"/>
               </a:rPr>
-              <a:t>Giant container ships, cargo drones and larger aircraft are new trends.</a:t>
+              <a:t>Trade and tourism: </a:t>
+            </a:r>
+            <a:pPr algn="l" indent="0" marL="0">
+              <a:spcAft>
+                <a:spcPts val="800"/>
+              </a:spcAft>
+              <a:buNone/>
+            </a:pPr>
+            <a:r>
+              <a:rPr lang="en-US" sz="4000" dirty="0">
+                <a:solidFill>
+                  <a:srgbClr val="111111"/>
+                </a:solidFill>
+                <a:latin typeface="Times New Roman" pitchFamily="34" charset="0"/>
+                <a:ea typeface="Times New Roman" pitchFamily="34" charset="-122"/>
+                <a:cs typeface="Times New Roman" pitchFamily="34" charset="-120"/>
+              </a:rPr>
+              <a:t>Goods and tourists arrive by ship and plane.</a:t>
             </a:r>
             <a:endParaRPr lang="en-US" sz="4000" dirty="0"/>
           </a:p>
@@ -15450,48 +15637,9 @@
           </a:p>
         </p:txBody>
       </p:sp>
-      <p:sp>
-        <p:nvSpPr>
-          <p:cNvPr id="3" name="Text 1"/>
-          <p:cNvSpPr/>
-          <p:nvPr/>
-        </p:nvSpPr>
-        <p:spPr>
-          <a:xfrm>
-            <a:off x="457200" y="1005840"/>
-            <a:ext cx="11277295" cy="731520"/>
-          </a:xfrm>
-          <a:prstGeom prst="rect">
-            <a:avLst/>
-          </a:prstGeom>
-          <a:noFill/>
-          <a:ln/>
-        </p:spPr>
-        <p:txBody>
-          <a:bodyPr wrap="square" lIns="0" tIns="0" rIns="0" bIns="0" rtlCol="0" anchor="ctr"/>
-          <a:lstStyle/>
-          <a:p>
-            <a:pPr algn="ctr" indent="0" marL="0">
-              <a:buNone/>
-            </a:pPr>
-            <a:r>
-              <a:rPr lang="en-US" sz="3600" b="1" dirty="0">
-                <a:solidFill>
-                  <a:srgbClr val="990011"/>
-                </a:solidFill>
-                <a:latin typeface="Times New Roman" pitchFamily="34" charset="0"/>
-                <a:ea typeface="Times New Roman" pitchFamily="34" charset="-122"/>
-                <a:cs typeface="Times New Roman" pitchFamily="34" charset="-120"/>
-              </a:rPr>
-              <a:t>3. Advantages, Disadvantages and Impact</a:t>
-            </a:r>
-            <a:endParaRPr lang="en-US" sz="3600" dirty="0"/>
-          </a:p>
-        </p:txBody>
-      </p:sp>
       <p:pic>
         <p:nvPicPr>
-          <p:cNvPr id="4" name="Image 0" descr="/home/claude/f4/img/v2/modes_big.png">    </p:cNvPr>
+          <p:cNvPr id="3" name="Image 0" descr="/home/claude/f4/img/minesec_sheet.png">    </p:cNvPr>
           <p:cNvPicPr>
             <a:picLocks noChangeAspect="1"/>
           </p:cNvPicPr>
@@ -15505,8 +15653,8 @@
         </p:blipFill>
         <p:spPr>
           <a:xfrm>
-            <a:off x="629930" y="1783080"/>
-            <a:ext cx="10931835" cy="4270248"/>
+            <a:off x="0" y="658368"/>
+            <a:ext cx="5120640" cy="5833872"/>
           </a:xfrm>
           <a:prstGeom prst="rect">
             <a:avLst/>
@@ -15515,14 +15663,14 @@
       </p:pic>
       <p:sp>
         <p:nvSpPr>
-          <p:cNvPr id="5" name="Text 2"/>
+          <p:cNvPr id="4" name="Text 1"/>
           <p:cNvSpPr/>
           <p:nvPr/>
         </p:nvSpPr>
         <p:spPr>
           <a:xfrm>
-            <a:off x="457200" y="6089904"/>
-            <a:ext cx="11277295" cy="347472"/>
+            <a:off x="5349240" y="1005840"/>
+            <a:ext cx="6522415" cy="731520"/>
           </a:xfrm>
           <a:prstGeom prst="rect">
             <a:avLst/>
@@ -15531,24 +15679,124 @@
           <a:ln/>
         </p:spPr>
         <p:txBody>
-          <a:bodyPr wrap="square" lIns="0" tIns="0" rIns="0" bIns="0" rtlCol="0" anchor="ctr"/>
+          <a:bodyPr wrap="square" lIns="0" tIns="0" rIns="0" bIns="0" rtlCol="0" anchor="ctr">
+            <a:normAutofit/>
+          </a:bodyPr>
           <a:lstStyle/>
           <a:p>
             <a:pPr algn="ctr" indent="0" marL="0">
               <a:buNone/>
             </a:pPr>
             <a:r>
-              <a:rPr lang="en-US" sz="1800" i="1" dirty="0">
-                <a:solidFill>
-                  <a:srgbClr val="555555"/>
+              <a:rPr lang="en-US" sz="3600" b="1" dirty="0">
+                <a:solidFill>
+                  <a:srgbClr val="990011"/>
                 </a:solidFill>
                 <a:latin typeface="Times New Roman" pitchFamily="34" charset="0"/>
                 <a:ea typeface="Times New Roman" pitchFamily="34" charset="-122"/>
                 <a:cs typeface="Times New Roman" pitchFamily="34" charset="-120"/>
               </a:rPr>
-              <a:t>Illustration: modes of transport</a:t>
-            </a:r>
-            <a:endParaRPr lang="en-US" sz="1800" dirty="0"/>
+              <a:t>3. Advantages, Disadvantages and Impact</a:t>
+            </a:r>
+            <a:endParaRPr lang="en-US" sz="3600" dirty="0"/>
+          </a:p>
+        </p:txBody>
+      </p:sp>
+      <p:sp>
+        <p:nvSpPr>
+          <p:cNvPr id="5" name="Text 2"/>
+          <p:cNvSpPr/>
+          <p:nvPr/>
+        </p:nvSpPr>
+        <p:spPr>
+          <a:xfrm>
+            <a:off x="5349240" y="1737360"/>
+            <a:ext cx="6522415" cy="457200"/>
+          </a:xfrm>
+          <a:prstGeom prst="rect">
+            <a:avLst/>
+          </a:prstGeom>
+          <a:noFill/>
+          <a:ln/>
+        </p:spPr>
+        <p:txBody>
+          <a:bodyPr wrap="square" lIns="0" tIns="0" rIns="0" bIns="0" rtlCol="0" anchor="ctr"/>
+          <a:lstStyle/>
+          <a:p>
+            <a:pPr algn="l" indent="0" marL="0">
+              <a:buNone/>
+            </a:pPr>
+            <a:r>
+              <a:rPr lang="en-US" sz="2200" b="1" dirty="0">
+                <a:solidFill>
+                  <a:srgbClr val="990011"/>
+                </a:solidFill>
+                <a:latin typeface="Times New Roman" pitchFamily="34" charset="0"/>
+                <a:ea typeface="Times New Roman" pitchFamily="34" charset="-122"/>
+                <a:cs typeface="Times New Roman" pitchFamily="34" charset="-120"/>
+              </a:rPr>
+              <a:t>B) Impact and Recent Developments (continued)</a:t>
+            </a:r>
+            <a:endParaRPr lang="en-US" sz="2200" dirty="0"/>
+          </a:p>
+        </p:txBody>
+      </p:sp>
+      <p:sp>
+        <p:nvSpPr>
+          <p:cNvPr id="6" name="Text 3"/>
+          <p:cNvSpPr/>
+          <p:nvPr/>
+        </p:nvSpPr>
+        <p:spPr>
+          <a:xfrm>
+            <a:off x="5349240" y="2240280"/>
+            <a:ext cx="6522415" cy="4206240"/>
+          </a:xfrm>
+          <a:prstGeom prst="rect">
+            <a:avLst/>
+          </a:prstGeom>
+          <a:noFill/>
+          <a:ln/>
+        </p:spPr>
+        <p:txBody>
+          <a:bodyPr wrap="square" lIns="0" tIns="0" rIns="0" bIns="0" rtlCol="0" anchor="t"/>
+          <a:lstStyle/>
+          <a:p>
+            <a:pPr algn="l" indent="0" marL="0">
+              <a:spcAft>
+                <a:spcPts val="800"/>
+              </a:spcAft>
+              <a:buNone/>
+            </a:pPr>
+            <a:r>
+              <a:rPr lang="en-US" sz="4000" b="1" dirty="0">
+                <a:solidFill>
+                  <a:srgbClr val="111111"/>
+                </a:solidFill>
+                <a:latin typeface="Times New Roman" pitchFamily="34" charset="0"/>
+                <a:ea typeface="Times New Roman" pitchFamily="34" charset="-122"/>
+                <a:cs typeface="Times New Roman" pitchFamily="34" charset="-120"/>
+              </a:rPr>
+              <a:t>Recent developments: </a:t>
+            </a:r>
+            <a:pPr algn="l" indent="0" marL="0">
+              <a:spcAft>
+                <a:spcPts val="800"/>
+              </a:spcAft>
+              <a:buNone/>
+            </a:pPr>
+            <a:r>
+              <a:rPr lang="en-US" sz="4000" dirty="0">
+                <a:solidFill>
+                  <a:srgbClr val="111111"/>
+                </a:solidFill>
+                <a:latin typeface="Times New Roman" pitchFamily="34" charset="0"/>
+                <a:ea typeface="Times New Roman" pitchFamily="34" charset="-122"/>
+                <a:cs typeface="Times New Roman" pitchFamily="34" charset="-120"/>
+              </a:rPr>
+              <a:t>Giant container ships and larger aircraft are new trends.</a:t>
+            </a:r>
+            <a:endParaRPr lang="en-US" sz="4000" dirty="0"/>
           </a:p>
         </p:txBody>
       </p:sp>
@@ -15658,15 +15906,54 @@
                 <a:ea typeface="Calibri" pitchFamily="34" charset="-122"/>
                 <a:cs typeface="Calibri" pitchFamily="34" charset="-120"/>
               </a:rPr>
-              <a:t>FORMATIVE EVALUATION</a:t>
+              <a:t>BOARD SUMMARY</a:t>
             </a:r>
             <a:endParaRPr lang="en-US" sz="1400" dirty="0"/>
+          </a:p>
+        </p:txBody>
+      </p:sp>
+      <p:sp>
+        <p:nvSpPr>
+          <p:cNvPr id="3" name="Text 1"/>
+          <p:cNvSpPr/>
+          <p:nvPr/>
+        </p:nvSpPr>
+        <p:spPr>
+          <a:xfrm>
+            <a:off x="457200" y="1005840"/>
+            <a:ext cx="11277295" cy="731520"/>
+          </a:xfrm>
+          <a:prstGeom prst="rect">
+            <a:avLst/>
+          </a:prstGeom>
+          <a:noFill/>
+          <a:ln/>
+        </p:spPr>
+        <p:txBody>
+          <a:bodyPr wrap="square" lIns="0" tIns="0" rIns="0" bIns="0" rtlCol="0" anchor="ctr"/>
+          <a:lstStyle/>
+          <a:p>
+            <a:pPr algn="ctr" indent="0" marL="0">
+              <a:buNone/>
+            </a:pPr>
+            <a:r>
+              <a:rPr lang="en-US" sz="3600" b="1" dirty="0">
+                <a:solidFill>
+                  <a:srgbClr val="990011"/>
+                </a:solidFill>
+                <a:latin typeface="Times New Roman" pitchFamily="34" charset="0"/>
+                <a:ea typeface="Times New Roman" pitchFamily="34" charset="-122"/>
+                <a:cs typeface="Times New Roman" pitchFamily="34" charset="-120"/>
+              </a:rPr>
+              <a:t>3. Advantages, Disadvantages and Impact</a:t>
+            </a:r>
+            <a:endParaRPr lang="en-US" sz="3600" dirty="0"/>
           </a:p>
         </p:txBody>
       </p:sp>
       <p:pic>
         <p:nvPicPr>
-          <p:cNvPr id="3" name="Image 0" descr="/home/claude/f4/img/minesec_sheet.png">    </p:cNvPr>
+          <p:cNvPr id="4" name="Image 0" descr="/home/claude/f4/img/v2/modes_big.png">    </p:cNvPr>
           <p:cNvPicPr>
             <a:picLocks noChangeAspect="1"/>
           </p:cNvPicPr>
@@ -15680,8 +15967,8 @@
         </p:blipFill>
         <p:spPr>
           <a:xfrm>
-            <a:off x="0" y="658368"/>
-            <a:ext cx="5120640" cy="5833872"/>
+            <a:off x="629930" y="1783080"/>
+            <a:ext cx="10931835" cy="4270248"/>
           </a:xfrm>
           <a:prstGeom prst="rect">
             <a:avLst/>
@@ -15690,14 +15977,14 @@
       </p:pic>
       <p:sp>
         <p:nvSpPr>
-          <p:cNvPr id="4" name="Text 1"/>
+          <p:cNvPr id="5" name="Text 2"/>
           <p:cNvSpPr/>
           <p:nvPr/>
         </p:nvSpPr>
         <p:spPr>
           <a:xfrm>
-            <a:off x="5349240" y="1005840"/>
-            <a:ext cx="6522415" cy="731520"/>
+            <a:off x="457200" y="6089904"/>
+            <a:ext cx="11277295" cy="347472"/>
           </a:xfrm>
           <a:prstGeom prst="rect">
             <a:avLst/>
@@ -15706,68 +15993,24 @@
           <a:ln/>
         </p:spPr>
         <p:txBody>
-          <a:bodyPr wrap="square" lIns="0" tIns="0" rIns="0" bIns="0" rtlCol="0" anchor="ctr">
-            <a:normAutofit/>
-          </a:bodyPr>
+          <a:bodyPr wrap="square" lIns="0" tIns="0" rIns="0" bIns="0" rtlCol="0" anchor="ctr"/>
           <a:lstStyle/>
           <a:p>
             <a:pPr algn="ctr" indent="0" marL="0">
               <a:buNone/>
             </a:pPr>
             <a:r>
-              <a:rPr lang="en-US" sz="3600" b="1" dirty="0">
-                <a:solidFill>
-                  <a:srgbClr val="990011"/>
+              <a:rPr lang="en-US" sz="1800" i="1" dirty="0">
+                <a:solidFill>
+                  <a:srgbClr val="555555"/>
                 </a:solidFill>
                 <a:latin typeface="Times New Roman" pitchFamily="34" charset="0"/>
                 <a:ea typeface="Times New Roman" pitchFamily="34" charset="-122"/>
                 <a:cs typeface="Times New Roman" pitchFamily="34" charset="-120"/>
               </a:rPr>
-              <a:t>Evaluation 1</a:t>
-            </a:r>
-            <a:endParaRPr lang="en-US" sz="3600" dirty="0"/>
-          </a:p>
-        </p:txBody>
-      </p:sp>
-      <p:sp>
-        <p:nvSpPr>
-          <p:cNvPr id="5" name="Text 2"/>
-          <p:cNvSpPr/>
-          <p:nvPr/>
-        </p:nvSpPr>
-        <p:spPr>
-          <a:xfrm>
-            <a:off x="5349240" y="1783080"/>
-            <a:ext cx="6522415" cy="4663440"/>
-          </a:xfrm>
-          <a:prstGeom prst="rect">
-            <a:avLst/>
-          </a:prstGeom>
-          <a:noFill/>
-          <a:ln/>
-        </p:spPr>
-        <p:txBody>
-          <a:bodyPr wrap="square" lIns="0" tIns="0" rIns="0" bIns="0" rtlCol="0" anchor="t"/>
-          <a:lstStyle/>
-          <a:p>
-            <a:pPr algn="l" indent="0" marL="0">
-              <a:spcAft>
-                <a:spcPts val="800"/>
-              </a:spcAft>
-              <a:buNone/>
-            </a:pPr>
-            <a:r>
-              <a:rPr lang="en-US" sz="4000" dirty="0">
-                <a:solidFill>
-                  <a:srgbClr val="111111"/>
-                </a:solidFill>
-                <a:latin typeface="Times New Roman" pitchFamily="34" charset="0"/>
-                <a:ea typeface="Times New Roman" pitchFamily="34" charset="-122"/>
-                <a:cs typeface="Times New Roman" pitchFamily="34" charset="-120"/>
-              </a:rPr>
-              <a:t>Give two types of ships.</a:t>
-            </a:r>
-            <a:endParaRPr lang="en-US" sz="4000" dirty="0"/>
+              <a:t>Illustration: modes of transport</a:t>
+            </a:r>
+            <a:endParaRPr lang="en-US" sz="1800" dirty="0"/>
           </a:p>
         </p:txBody>
       </p:sp>
@@ -15942,7 +16185,7 @@
                 <a:ea typeface="Times New Roman" pitchFamily="34" charset="-122"/>
                 <a:cs typeface="Times New Roman" pitchFamily="34" charset="-120"/>
               </a:rPr>
-              <a:t>Expected Answer</a:t>
+              <a:t>Evaluation 1</a:t>
             </a:r>
             <a:endParaRPr lang="en-US" sz="3600" dirty="0"/>
           </a:p>
@@ -15984,7 +16227,7 @@
                 <a:ea typeface="Times New Roman" pitchFamily="34" charset="-122"/>
                 <a:cs typeface="Times New Roman" pitchFamily="34" charset="-120"/>
               </a:rPr>
-              <a:t>Tankers and container ships.</a:t>
+              <a:t>Give two types of ships.</a:t>
             </a:r>
             <a:endParaRPr lang="en-US" sz="4000" dirty="0"/>
           </a:p>
@@ -16161,7 +16404,7 @@
                 <a:ea typeface="Times New Roman" pitchFamily="34" charset="-122"/>
                 <a:cs typeface="Times New Roman" pitchFamily="34" charset="-120"/>
               </a:rPr>
-              <a:t>Evaluation 2</a:t>
+              <a:t>Expected Answer</a:t>
             </a:r>
             <a:endParaRPr lang="en-US" sz="3600" dirty="0"/>
           </a:p>
@@ -16203,7 +16446,7 @@
                 <a:ea typeface="Times New Roman" pitchFamily="34" charset="-122"/>
                 <a:cs typeface="Times New Roman" pitchFamily="34" charset="-120"/>
               </a:rPr>
-              <a:t>Give one advantage and one disadvantage of air transport.</a:t>
+              <a:t>Tankers and container ships.</a:t>
             </a:r>
             <a:endParaRPr lang="en-US" sz="4000" dirty="0"/>
           </a:p>
@@ -16380,7 +16623,7 @@
                 <a:ea typeface="Times New Roman" pitchFamily="34" charset="-122"/>
                 <a:cs typeface="Times New Roman" pitchFamily="34" charset="-120"/>
               </a:rPr>
-              <a:t>Expected Answer</a:t>
+              <a:t>Evaluation 2</a:t>
             </a:r>
             <a:endParaRPr lang="en-US" sz="3600" dirty="0"/>
           </a:p>
@@ -16422,7 +16665,7 @@
                 <a:ea typeface="Times New Roman" pitchFamily="34" charset="-122"/>
                 <a:cs typeface="Times New Roman" pitchFamily="34" charset="-120"/>
               </a:rPr>
-              <a:t>Fast; very costly.</a:t>
+              <a:t>Give one advantage and one disadvantage of air transport.</a:t>
             </a:r>
             <a:endParaRPr lang="en-US" sz="4000" dirty="0"/>
           </a:p>
@@ -16534,7 +16777,7 @@
                 <a:ea typeface="Calibri" pitchFamily="34" charset="-122"/>
                 <a:cs typeface="Calibri" pitchFamily="34" charset="-120"/>
               </a:rPr>
-              <a:t>REMEDIATION</a:t>
+              <a:t>FORMATIVE EVALUATION</a:t>
             </a:r>
             <a:endParaRPr lang="en-US" sz="1400" dirty="0"/>
           </a:p>
@@ -16557,7 +16800,7 @@
         <p:spPr>
           <a:xfrm>
             <a:off x="0" y="658368"/>
-            <a:ext cx="2468880" cy="5833872"/>
+            <a:ext cx="5120640" cy="5833872"/>
           </a:xfrm>
           <a:prstGeom prst="rect">
             <a:avLst/>
@@ -16572,8 +16815,8 @@
         </p:nvSpPr>
         <p:spPr>
           <a:xfrm>
-            <a:off x="2697480" y="1005840"/>
-            <a:ext cx="9174175" cy="731520"/>
+            <a:off x="5349240" y="1005840"/>
+            <a:ext cx="6522415" cy="731520"/>
           </a:xfrm>
           <a:prstGeom prst="rect">
             <a:avLst/>
@@ -16599,7 +16842,7 @@
                 <a:ea typeface="Times New Roman" pitchFamily="34" charset="-122"/>
                 <a:cs typeface="Times New Roman" pitchFamily="34" charset="-120"/>
               </a:rPr>
-              <a:t>Remediation</a:t>
+              <a:t>Expected Answer</a:t>
             </a:r>
             <a:endParaRPr lang="en-US" sz="3600" dirty="0"/>
           </a:p>
@@ -16613,8 +16856,8 @@
         </p:nvSpPr>
         <p:spPr>
           <a:xfrm>
-            <a:off x="2697480" y="1783080"/>
-            <a:ext cx="9174175" cy="4663440"/>
+            <a:off x="5349240" y="1783080"/>
+            <a:ext cx="6522415" cy="4663440"/>
           </a:xfrm>
           <a:prstGeom prst="rect">
             <a:avLst/>
@@ -16633,7 +16876,7 @@
               <a:buNone/>
             </a:pPr>
             <a:r>
-              <a:rPr lang="en-US" sz="4000" b="1" dirty="0">
+              <a:rPr lang="en-US" sz="4000" dirty="0">
                 <a:solidFill>
                   <a:srgbClr val="111111"/>
                 </a:solidFill>
@@ -16641,73 +16884,7 @@
                 <a:ea typeface="Times New Roman" pitchFamily="34" charset="-122"/>
                 <a:cs typeface="Times New Roman" pitchFamily="34" charset="-120"/>
               </a:rPr>
-              <a:t>Fill in the blanks:</a:t>
-            </a:r>
-            <a:endParaRPr lang="en-US" sz="4000" dirty="0"/>
-          </a:p>
-          <a:p>
-            <a:pPr algn="l" marL="342900" indent="-342900">
-              <a:spcAft>
-                <a:spcPts val="800"/>
-              </a:spcAft>
-              <a:buSzPct val="100000"/>
-              <a:buFont typeface="+mj-lt"/>
-              <a:buAutoNum type="arabicPeriod" startAt="1"/>
-            </a:pPr>
-            <a:r>
-              <a:rPr lang="en-US" sz="4000" dirty="0">
-                <a:solidFill>
-                  <a:srgbClr val="111111"/>
-                </a:solidFill>
-                <a:latin typeface="Times New Roman" pitchFamily="34" charset="0"/>
-                <a:ea typeface="Times New Roman" pitchFamily="34" charset="-122"/>
-                <a:cs typeface="Times New Roman" pitchFamily="34" charset="-120"/>
-              </a:rPr>
-              <a:t>A ship that carries oil is a ______.</a:t>
-            </a:r>
-            <a:endParaRPr lang="en-US" sz="4000" dirty="0"/>
-          </a:p>
-          <a:p>
-            <a:pPr algn="l" marL="342900" indent="-342900">
-              <a:spcAft>
-                <a:spcPts val="800"/>
-              </a:spcAft>
-              <a:buSzPct val="100000"/>
-              <a:buFont typeface="+mj-lt"/>
-              <a:buAutoNum type="arabicPeriod" startAt="1"/>
-            </a:pPr>
-            <a:r>
-              <a:rPr lang="en-US" sz="4000" dirty="0">
-                <a:solidFill>
-                  <a:srgbClr val="111111"/>
-                </a:solidFill>
-                <a:latin typeface="Times New Roman" pitchFamily="34" charset="0"/>
-                <a:ea typeface="Times New Roman" pitchFamily="34" charset="-122"/>
-                <a:cs typeface="Times New Roman" pitchFamily="34" charset="-120"/>
-              </a:rPr>
-              <a:t>A ship that carries passengers is a ______.</a:t>
-            </a:r>
-            <a:endParaRPr lang="en-US" sz="4000" dirty="0"/>
-          </a:p>
-          <a:p>
-            <a:pPr algn="l" marL="342900" indent="-342900">
-              <a:spcAft>
-                <a:spcPts val="800"/>
-              </a:spcAft>
-              <a:buSzPct val="100000"/>
-              <a:buFont typeface="+mj-lt"/>
-              <a:buAutoNum type="arabicPeriod" startAt="1"/>
-            </a:pPr>
-            <a:r>
-              <a:rPr lang="en-US" sz="4000" dirty="0">
-                <a:solidFill>
-                  <a:srgbClr val="111111"/>
-                </a:solidFill>
-                <a:latin typeface="Times New Roman" pitchFamily="34" charset="0"/>
-                <a:ea typeface="Times New Roman" pitchFamily="34" charset="-122"/>
-                <a:cs typeface="Times New Roman" pitchFamily="34" charset="-120"/>
-              </a:rPr>
-              <a:t>The fastest mode of transport is ______ transport.</a:t>
+              <a:t>Fast; very costly.</a:t>
             </a:r>
             <a:endParaRPr lang="en-US" sz="4000" dirty="0"/>
           </a:p>
@@ -16819,7 +16996,7 @@
                 <a:ea typeface="Calibri" pitchFamily="34" charset="-122"/>
                 <a:cs typeface="Calibri" pitchFamily="34" charset="-120"/>
               </a:rPr>
-              <a:t>HOMEWORK</a:t>
+              <a:t>REMEDIATION</a:t>
             </a:r>
             <a:endParaRPr lang="en-US" sz="1400" dirty="0"/>
           </a:p>
@@ -16842,7 +17019,7 @@
         <p:spPr>
           <a:xfrm>
             <a:off x="0" y="658368"/>
-            <a:ext cx="5120640" cy="5833872"/>
+            <a:ext cx="2468880" cy="5833872"/>
           </a:xfrm>
           <a:prstGeom prst="rect">
             <a:avLst/>
@@ -16857,8 +17034,8 @@
         </p:nvSpPr>
         <p:spPr>
           <a:xfrm>
-            <a:off x="5349240" y="1005840"/>
-            <a:ext cx="6522415" cy="731520"/>
+            <a:off x="2697480" y="1005840"/>
+            <a:ext cx="9174175" cy="731520"/>
           </a:xfrm>
           <a:prstGeom prst="rect">
             <a:avLst/>
@@ -16884,7 +17061,7 @@
                 <a:ea typeface="Times New Roman" pitchFamily="34" charset="-122"/>
                 <a:cs typeface="Times New Roman" pitchFamily="34" charset="-120"/>
               </a:rPr>
-              <a:t>Homework</a:t>
+              <a:t>Remediation</a:t>
             </a:r>
             <a:endParaRPr lang="en-US" sz="3600" dirty="0"/>
           </a:p>
@@ -16898,8 +17075,8 @@
         </p:nvSpPr>
         <p:spPr>
           <a:xfrm>
-            <a:off x="5349240" y="1783080"/>
-            <a:ext cx="6522415" cy="4663440"/>
+            <a:off x="2697480" y="1783080"/>
+            <a:ext cx="9174175" cy="4663440"/>
           </a:xfrm>
           <a:prstGeom prst="rect">
             <a:avLst/>
@@ -16918,7 +17095,7 @@
               <a:buNone/>
             </a:pPr>
             <a:r>
-              <a:rPr lang="en-US" sz="4000" dirty="0">
+              <a:rPr lang="en-US" sz="4000" b="1" dirty="0">
                 <a:solidFill>
                   <a:srgbClr val="111111"/>
                 </a:solidFill>
@@ -16926,7 +17103,73 @@
                 <a:ea typeface="Times New Roman" pitchFamily="34" charset="-122"/>
                 <a:cs typeface="Times New Roman" pitchFamily="34" charset="-120"/>
               </a:rPr>
-              <a:t>Name the seaports and international airports of Cameroon.</a:t>
+              <a:t>Fill in the blanks:</a:t>
+            </a:r>
+            <a:endParaRPr lang="en-US" sz="4000" dirty="0"/>
+          </a:p>
+          <a:p>
+            <a:pPr algn="l" marL="342900" indent="-342900">
+              <a:spcAft>
+                <a:spcPts val="800"/>
+              </a:spcAft>
+              <a:buSzPct val="100000"/>
+              <a:buFont typeface="+mj-lt"/>
+              <a:buAutoNum type="arabicPeriod" startAt="1"/>
+            </a:pPr>
+            <a:r>
+              <a:rPr lang="en-US" sz="4000" dirty="0">
+                <a:solidFill>
+                  <a:srgbClr val="111111"/>
+                </a:solidFill>
+                <a:latin typeface="Times New Roman" pitchFamily="34" charset="0"/>
+                <a:ea typeface="Times New Roman" pitchFamily="34" charset="-122"/>
+                <a:cs typeface="Times New Roman" pitchFamily="34" charset="-120"/>
+              </a:rPr>
+              <a:t>A ship that carries oil is a ______.</a:t>
+            </a:r>
+            <a:endParaRPr lang="en-US" sz="4000" dirty="0"/>
+          </a:p>
+          <a:p>
+            <a:pPr algn="l" marL="342900" indent="-342900">
+              <a:spcAft>
+                <a:spcPts val="800"/>
+              </a:spcAft>
+              <a:buSzPct val="100000"/>
+              <a:buFont typeface="+mj-lt"/>
+              <a:buAutoNum type="arabicPeriod" startAt="1"/>
+            </a:pPr>
+            <a:r>
+              <a:rPr lang="en-US" sz="4000" dirty="0">
+                <a:solidFill>
+                  <a:srgbClr val="111111"/>
+                </a:solidFill>
+                <a:latin typeface="Times New Roman" pitchFamily="34" charset="0"/>
+                <a:ea typeface="Times New Roman" pitchFamily="34" charset="-122"/>
+                <a:cs typeface="Times New Roman" pitchFamily="34" charset="-120"/>
+              </a:rPr>
+              <a:t>A ship that carries passengers is a ______.</a:t>
+            </a:r>
+            <a:endParaRPr lang="en-US" sz="4000" dirty="0"/>
+          </a:p>
+          <a:p>
+            <a:pPr algn="l" marL="342900" indent="-342900">
+              <a:spcAft>
+                <a:spcPts val="800"/>
+              </a:spcAft>
+              <a:buSzPct val="100000"/>
+              <a:buFont typeface="+mj-lt"/>
+              <a:buAutoNum type="arabicPeriod" startAt="1"/>
+            </a:pPr>
+            <a:r>
+              <a:rPr lang="en-US" sz="4000" dirty="0">
+                <a:solidFill>
+                  <a:srgbClr val="111111"/>
+                </a:solidFill>
+                <a:latin typeface="Times New Roman" pitchFamily="34" charset="0"/>
+                <a:ea typeface="Times New Roman" pitchFamily="34" charset="-122"/>
+                <a:cs typeface="Times New Roman" pitchFamily="34" charset="-120"/>
+              </a:rPr>
+              <a:t>The fastest mode of transport is ______ transport.</a:t>
             </a:r>
             <a:endParaRPr lang="en-US" sz="4000" dirty="0"/>
           </a:p>
@@ -17038,7 +17281,7 @@
                 <a:ea typeface="Calibri" pitchFamily="34" charset="-122"/>
                 <a:cs typeface="Calibri" pitchFamily="34" charset="-120"/>
               </a:rPr>
-              <a:t>NEXT LESSON</a:t>
+              <a:t>HOMEWORK</a:t>
             </a:r>
             <a:endParaRPr lang="en-US" sz="1400" dirty="0"/>
           </a:p>
@@ -17103,7 +17346,7 @@
                 <a:ea typeface="Times New Roman" pitchFamily="34" charset="-122"/>
                 <a:cs typeface="Times New Roman" pitchFamily="34" charset="-120"/>
               </a:rPr>
-              <a:t>Next Lesson</a:t>
+              <a:t>Homework</a:t>
             </a:r>
             <a:endParaRPr lang="en-US" sz="3600" dirty="0"/>
           </a:p>
@@ -17127,17 +17370,17 @@
           <a:ln/>
         </p:spPr>
         <p:txBody>
-          <a:bodyPr wrap="square" lIns="0" tIns="0" rIns="0" bIns="0" rtlCol="0" anchor="ctr"/>
-          <a:lstStyle/>
-          <a:p>
-            <a:pPr algn="ctr" indent="0" marL="0">
+          <a:bodyPr wrap="square" lIns="0" tIns="0" rIns="0" bIns="0" rtlCol="0" anchor="t"/>
+          <a:lstStyle/>
+          <a:p>
+            <a:pPr algn="l" indent="0" marL="0">
               <a:spcAft>
                 <a:spcPts val="800"/>
               </a:spcAft>
               <a:buNone/>
             </a:pPr>
             <a:r>
-              <a:rPr lang="en-US" sz="4000" b="1" dirty="0">
+              <a:rPr lang="en-US" sz="4000" dirty="0">
                 <a:solidFill>
                   <a:srgbClr val="111111"/>
                 </a:solidFill>
@@ -17145,27 +17388,7 @@
                 <a:ea typeface="Times New Roman" pitchFamily="34" charset="-122"/>
                 <a:cs typeface="Times New Roman" pitchFamily="34" charset="-120"/>
               </a:rPr>
-              <a:t>Our next lesson will be on:</a:t>
-            </a:r>
-            <a:endParaRPr lang="en-US" sz="4000" dirty="0"/>
-          </a:p>
-          <a:p>
-            <a:pPr algn="ctr" indent="0" marL="0">
-              <a:spcAft>
-                <a:spcPts val="800"/>
-              </a:spcAft>
-              <a:buNone/>
-            </a:pPr>
-            <a:r>
-              <a:rPr lang="en-US" sz="4000" b="1" dirty="0">
-                <a:solidFill>
-                  <a:srgbClr val="990011"/>
-                </a:solidFill>
-                <a:latin typeface="Times New Roman" pitchFamily="34" charset="0"/>
-                <a:ea typeface="Times New Roman" pitchFamily="34" charset="-122"/>
-                <a:cs typeface="Times New Roman" pitchFamily="34" charset="-120"/>
-              </a:rPr>
-              <a:t>Further Study 2: Containerisation</a:t>
+              <a:t>Name the seaports and international airports of Cameroon.</a:t>
             </a:r>
             <a:endParaRPr lang="en-US" sz="4000" dirty="0"/>
           </a:p>
@@ -17277,6 +17500,464 @@
                 <a:ea typeface="Calibri" pitchFamily="34" charset="-122"/>
                 <a:cs typeface="Calibri" pitchFamily="34" charset="-120"/>
               </a:rPr>
+              <a:t>NEXT LESSON</a:t>
+            </a:r>
+            <a:endParaRPr lang="en-US" sz="1400" dirty="0"/>
+          </a:p>
+        </p:txBody>
+      </p:sp>
+      <p:pic>
+        <p:nvPicPr>
+          <p:cNvPr id="3" name="Image 0" descr="/home/claude/f4/img/minesec_sheet.png">    </p:cNvPr>
+          <p:cNvPicPr>
+            <a:picLocks noChangeAspect="1"/>
+          </p:cNvPicPr>
+          <p:nvPr/>
+        </p:nvPicPr>
+        <p:blipFill>
+          <a:blip r:embed="rId1"/>
+          <a:stretch>
+            <a:fillRect/>
+          </a:stretch>
+        </p:blipFill>
+        <p:spPr>
+          <a:xfrm>
+            <a:off x="0" y="658368"/>
+            <a:ext cx="5120640" cy="5833872"/>
+          </a:xfrm>
+          <a:prstGeom prst="rect">
+            <a:avLst/>
+          </a:prstGeom>
+        </p:spPr>
+      </p:pic>
+      <p:sp>
+        <p:nvSpPr>
+          <p:cNvPr id="4" name="Text 1"/>
+          <p:cNvSpPr/>
+          <p:nvPr/>
+        </p:nvSpPr>
+        <p:spPr>
+          <a:xfrm>
+            <a:off x="5349240" y="1005840"/>
+            <a:ext cx="6522415" cy="731520"/>
+          </a:xfrm>
+          <a:prstGeom prst="rect">
+            <a:avLst/>
+          </a:prstGeom>
+          <a:noFill/>
+          <a:ln/>
+        </p:spPr>
+        <p:txBody>
+          <a:bodyPr wrap="square" lIns="0" tIns="0" rIns="0" bIns="0" rtlCol="0" anchor="ctr">
+            <a:normAutofit/>
+          </a:bodyPr>
+          <a:lstStyle/>
+          <a:p>
+            <a:pPr algn="ctr" indent="0" marL="0">
+              <a:buNone/>
+            </a:pPr>
+            <a:r>
+              <a:rPr lang="en-US" sz="3600" b="1" dirty="0">
+                <a:solidFill>
+                  <a:srgbClr val="990011"/>
+                </a:solidFill>
+                <a:latin typeface="Times New Roman" pitchFamily="34" charset="0"/>
+                <a:ea typeface="Times New Roman" pitchFamily="34" charset="-122"/>
+                <a:cs typeface="Times New Roman" pitchFamily="34" charset="-120"/>
+              </a:rPr>
+              <a:t>Next Lesson</a:t>
+            </a:r>
+            <a:endParaRPr lang="en-US" sz="3600" dirty="0"/>
+          </a:p>
+        </p:txBody>
+      </p:sp>
+      <p:sp>
+        <p:nvSpPr>
+          <p:cNvPr id="5" name="Text 2"/>
+          <p:cNvSpPr/>
+          <p:nvPr/>
+        </p:nvSpPr>
+        <p:spPr>
+          <a:xfrm>
+            <a:off x="5349240" y="1783080"/>
+            <a:ext cx="6522415" cy="4663440"/>
+          </a:xfrm>
+          <a:prstGeom prst="rect">
+            <a:avLst/>
+          </a:prstGeom>
+          <a:noFill/>
+          <a:ln/>
+        </p:spPr>
+        <p:txBody>
+          <a:bodyPr wrap="square" lIns="0" tIns="0" rIns="0" bIns="0" rtlCol="0" anchor="ctr"/>
+          <a:lstStyle/>
+          <a:p>
+            <a:pPr algn="ctr" indent="0" marL="0">
+              <a:spcAft>
+                <a:spcPts val="800"/>
+              </a:spcAft>
+              <a:buNone/>
+            </a:pPr>
+            <a:r>
+              <a:rPr lang="en-US" sz="4000" b="1" dirty="0">
+                <a:solidFill>
+                  <a:srgbClr val="111111"/>
+                </a:solidFill>
+                <a:latin typeface="Times New Roman" pitchFamily="34" charset="0"/>
+                <a:ea typeface="Times New Roman" pitchFamily="34" charset="-122"/>
+                <a:cs typeface="Times New Roman" pitchFamily="34" charset="-120"/>
+              </a:rPr>
+              <a:t>Our next lesson will be on:</a:t>
+            </a:r>
+            <a:endParaRPr lang="en-US" sz="4000" dirty="0"/>
+          </a:p>
+          <a:p>
+            <a:pPr algn="ctr" indent="0" marL="0">
+              <a:spcAft>
+                <a:spcPts val="800"/>
+              </a:spcAft>
+              <a:buNone/>
+            </a:pPr>
+            <a:r>
+              <a:rPr lang="en-US" sz="4000" b="1" dirty="0">
+                <a:solidFill>
+                  <a:srgbClr val="990011"/>
+                </a:solidFill>
+                <a:latin typeface="Times New Roman" pitchFamily="34" charset="0"/>
+                <a:ea typeface="Times New Roman" pitchFamily="34" charset="-122"/>
+                <a:cs typeface="Times New Roman" pitchFamily="34" charset="-120"/>
+              </a:rPr>
+              <a:t>Further Study 2: Containerisation</a:t>
+            </a:r>
+            <a:endParaRPr lang="en-US" sz="4000" dirty="0"/>
+          </a:p>
+        </p:txBody>
+      </p:sp>
+      <p:sp>
+        <p:nvSpPr>
+          <p:cNvPr id="25" name="Slide Number Placeholder 0"/>
+          <p:cNvSpPr>
+            <a:spLocks noGrp="1"/>
+          </p:cNvSpPr>
+          <p:nvPr>
+            <p:ph type="sldNum" sz="quarter" idx="4294967295"/>
+          </p:nvPr>
+        </p:nvSpPr>
+        <p:spPr>
+          <a:xfrm>
+            <a:off x="27432" y="91440"/>
+            <a:ext cx="585216" cy="475488"/>
+          </a:xfrm>
+          <a:prstGeom prst="rect">
+            <a:avLst/>
+          </a:prstGeom>
+          <a:extLst>
+            <a:ext uri="{C572A759-6A51-4108-AA02-DFA0A04FC94B}">
+              <ma14:wrappingTextBoxFlag xmlns:ma14="http://schemas.microsoft.com/office/mac/drawingml/2011/main" val="0"/>
+            </a:ext>
+          </a:extLst>
+        </p:spPr>
+        <p:txBody>
+          <a:bodyPr/>
+          <a:lstStyle>
+            <a:lvl1pPr>
+              <a:defRPr sz="2000">
+                <a:solidFill>
+                  <a:srgbClr val="FFFFFF"/>
+                </a:solidFill>
+                <a:latin typeface="Calibri"/>
+                <a:ea typeface="Calibri"/>
+                <a:cs typeface="Calibri"/>
+              </a:defRPr>
+            </a:lvl1pPr>
+          </a:lstStyle>
+          <a:p>
+            <a:pPr algn="ctr"/>
+            <a:fld id="{F7021451-1387-4CA6-816F-3879F97B5CBC}" type="slidenum">
+              <a:rPr b="1" lang="en-US"/>
+              <a:t>49</a:t>
+            </a:fld>
+            <a:endParaRPr lang="en-US"/>
+          </a:p>
+        </p:txBody>
+      </p:sp>
+    </p:spTree>
+  </p:cSld>
+  <p:clrMapOvr>
+    <a:masterClrMapping/>
+  </p:clrMapOvr>
+</p:sld>
+</file>
+
+<file path=ppt/slides/slide5.xml><?xml version="1.0" encoding="utf-8"?>
+<p:sld xmlns:a="http://schemas.openxmlformats.org/drawingml/2006/main" xmlns:r="http://schemas.openxmlformats.org/officeDocument/2006/relationships" xmlns:p="http://schemas.openxmlformats.org/presentationml/2006/main">
+  <p:cSld name="Slide 5">
+    <p:spTree>
+      <p:nvGrpSpPr>
+        <p:cNvPr id="1" name=""/>
+        <p:cNvGrpSpPr/>
+        <p:nvPr/>
+      </p:nvGrpSpPr>
+      <p:grpSpPr>
+        <a:xfrm>
+          <a:off x="0" y="0"/>
+          <a:ext cx="0" cy="0"/>
+          <a:chOff x="0" y="0"/>
+          <a:chExt cx="0" cy="0"/>
+        </a:xfrm>
+      </p:grpSpPr>
+      <p:sp>
+        <p:nvSpPr>
+          <p:cNvPr id="2" name="Text 0"/>
+          <p:cNvSpPr/>
+          <p:nvPr/>
+        </p:nvSpPr>
+        <p:spPr>
+          <a:xfrm>
+            <a:off x="457200" y="713232"/>
+            <a:ext cx="11368735" cy="274320"/>
+          </a:xfrm>
+          <a:prstGeom prst="rect">
+            <a:avLst/>
+          </a:prstGeom>
+          <a:noFill/>
+          <a:ln/>
+        </p:spPr>
+        <p:txBody>
+          <a:bodyPr wrap="square" lIns="0" tIns="0" rIns="0" bIns="0" rtlCol="0" anchor="ctr"/>
+          <a:lstStyle/>
+          <a:p>
+            <a:pPr algn="r" indent="0" marL="0">
+              <a:buNone/>
+            </a:pPr>
+            <a:r>
+              <a:rPr lang="en-US" sz="1400" b="1" dirty="0">
+                <a:solidFill>
+                  <a:srgbClr val="1C3F6E"/>
+                </a:solidFill>
+                <a:latin typeface="Calibri" pitchFamily="34" charset="0"/>
+                <a:ea typeface="Calibri" pitchFamily="34" charset="-122"/>
+                <a:cs typeface="Calibri" pitchFamily="34" charset="-120"/>
+              </a:rPr>
+              <a:t>HOMEWORK CORRECTION</a:t>
+            </a:r>
+            <a:endParaRPr lang="en-US" sz="1400" dirty="0"/>
+          </a:p>
+        </p:txBody>
+      </p:sp>
+      <p:pic>
+        <p:nvPicPr>
+          <p:cNvPr id="3" name="Image 0" descr="/home/claude/f4/img/minesec_sheet.png">    </p:cNvPr>
+          <p:cNvPicPr>
+            <a:picLocks noChangeAspect="1"/>
+          </p:cNvPicPr>
+          <p:nvPr/>
+        </p:nvPicPr>
+        <p:blipFill>
+          <a:blip r:embed="rId1"/>
+          <a:stretch>
+            <a:fillRect/>
+          </a:stretch>
+        </p:blipFill>
+        <p:spPr>
+          <a:xfrm>
+            <a:off x="0" y="658368"/>
+            <a:ext cx="5120640" cy="5833872"/>
+          </a:xfrm>
+          <a:prstGeom prst="rect">
+            <a:avLst/>
+          </a:prstGeom>
+        </p:spPr>
+      </p:pic>
+      <p:sp>
+        <p:nvSpPr>
+          <p:cNvPr id="4" name="Text 1"/>
+          <p:cNvSpPr/>
+          <p:nvPr/>
+        </p:nvSpPr>
+        <p:spPr>
+          <a:xfrm>
+            <a:off x="5349240" y="1005840"/>
+            <a:ext cx="6522415" cy="731520"/>
+          </a:xfrm>
+          <a:prstGeom prst="rect">
+            <a:avLst/>
+          </a:prstGeom>
+          <a:noFill/>
+          <a:ln/>
+        </p:spPr>
+        <p:txBody>
+          <a:bodyPr wrap="square" lIns="0" tIns="0" rIns="0" bIns="0" rtlCol="0" anchor="ctr">
+            <a:normAutofit/>
+          </a:bodyPr>
+          <a:lstStyle/>
+          <a:p>
+            <a:pPr algn="ctr" indent="0" marL="0">
+              <a:buNone/>
+            </a:pPr>
+            <a:r>
+              <a:rPr lang="en-US" sz="3600" b="1" dirty="0">
+                <a:solidFill>
+                  <a:srgbClr val="990011"/>
+                </a:solidFill>
+                <a:latin typeface="Times New Roman" pitchFamily="34" charset="0"/>
+                <a:ea typeface="Times New Roman" pitchFamily="34" charset="-122"/>
+                <a:cs typeface="Times New Roman" pitchFamily="34" charset="-120"/>
+              </a:rPr>
+              <a:t>Correction: Possible Answer</a:t>
+            </a:r>
+            <a:endParaRPr lang="en-US" sz="3600" dirty="0"/>
+          </a:p>
+        </p:txBody>
+      </p:sp>
+      <p:sp>
+        <p:nvSpPr>
+          <p:cNvPr id="5" name="Text 2"/>
+          <p:cNvSpPr/>
+          <p:nvPr/>
+        </p:nvSpPr>
+        <p:spPr>
+          <a:xfrm>
+            <a:off x="5349240" y="1783080"/>
+            <a:ext cx="6522415" cy="4663440"/>
+          </a:xfrm>
+          <a:prstGeom prst="rect">
+            <a:avLst/>
+          </a:prstGeom>
+          <a:noFill/>
+          <a:ln/>
+        </p:spPr>
+        <p:txBody>
+          <a:bodyPr wrap="square" lIns="0" tIns="0" rIns="0" bIns="0" rtlCol="0" anchor="t"/>
+          <a:lstStyle/>
+          <a:p>
+            <a:pPr algn="l" indent="0" marL="0">
+              <a:spcAft>
+                <a:spcPts val="800"/>
+              </a:spcAft>
+              <a:buNone/>
+            </a:pPr>
+            <a:r>
+              <a:rPr lang="en-US" sz="4000" dirty="0">
+                <a:solidFill>
+                  <a:srgbClr val="111111"/>
+                </a:solidFill>
+                <a:latin typeface="Times New Roman" pitchFamily="34" charset="0"/>
+                <a:ea typeface="Times New Roman" pitchFamily="34" charset="-122"/>
+                <a:cs typeface="Times New Roman" pitchFamily="34" charset="-120"/>
+              </a:rPr>
+              <a:t>Faster and cheaper travel, more trade and lower prices, new shops and jobs along the road, but more accidents and speeding.</a:t>
+            </a:r>
+            <a:endParaRPr lang="en-US" sz="4000" dirty="0"/>
+          </a:p>
+        </p:txBody>
+      </p:sp>
+      <p:sp>
+        <p:nvSpPr>
+          <p:cNvPr id="25" name="Slide Number Placeholder 0"/>
+          <p:cNvSpPr>
+            <a:spLocks noGrp="1"/>
+          </p:cNvSpPr>
+          <p:nvPr>
+            <p:ph type="sldNum" sz="quarter" idx="4294967295"/>
+          </p:nvPr>
+        </p:nvSpPr>
+        <p:spPr>
+          <a:xfrm>
+            <a:off x="27432" y="91440"/>
+            <a:ext cx="585216" cy="475488"/>
+          </a:xfrm>
+          <a:prstGeom prst="rect">
+            <a:avLst/>
+          </a:prstGeom>
+          <a:extLst>
+            <a:ext uri="{C572A759-6A51-4108-AA02-DFA0A04FC94B}">
+              <ma14:wrappingTextBoxFlag xmlns:ma14="http://schemas.microsoft.com/office/mac/drawingml/2011/main" val="0"/>
+            </a:ext>
+          </a:extLst>
+        </p:spPr>
+        <p:txBody>
+          <a:bodyPr/>
+          <a:lstStyle>
+            <a:lvl1pPr>
+              <a:defRPr sz="2000">
+                <a:solidFill>
+                  <a:srgbClr val="FFFFFF"/>
+                </a:solidFill>
+                <a:latin typeface="Calibri"/>
+                <a:ea typeface="Calibri"/>
+                <a:cs typeface="Calibri"/>
+              </a:defRPr>
+            </a:lvl1pPr>
+          </a:lstStyle>
+          <a:p>
+            <a:pPr algn="ctr"/>
+            <a:fld id="{F7021451-1387-4CA6-816F-3879F97B5CBC}" type="slidenum">
+              <a:rPr b="1" lang="en-US"/>
+              <a:t>5</a:t>
+            </a:fld>
+            <a:endParaRPr lang="en-US"/>
+          </a:p>
+        </p:txBody>
+      </p:sp>
+    </p:spTree>
+  </p:cSld>
+  <p:clrMapOvr>
+    <a:masterClrMapping/>
+  </p:clrMapOvr>
+</p:sld>
+</file>
+
+<file path=ppt/slides/slide50.xml><?xml version="1.0" encoding="utf-8"?>
+<p:sld xmlns:a="http://schemas.openxmlformats.org/drawingml/2006/main" xmlns:r="http://schemas.openxmlformats.org/officeDocument/2006/relationships" xmlns:p="http://schemas.openxmlformats.org/presentationml/2006/main">
+  <p:cSld name="Slide 50">
+    <p:spTree>
+      <p:nvGrpSpPr>
+        <p:cNvPr id="1" name=""/>
+        <p:cNvGrpSpPr/>
+        <p:nvPr/>
+      </p:nvGrpSpPr>
+      <p:grpSpPr>
+        <a:xfrm>
+          <a:off x="0" y="0"/>
+          <a:ext cx="0" cy="0"/>
+          <a:chOff x="0" y="0"/>
+          <a:chExt cx="0" cy="0"/>
+        </a:xfrm>
+      </p:grpSpPr>
+      <p:sp>
+        <p:nvSpPr>
+          <p:cNvPr id="2" name="Text 0"/>
+          <p:cNvSpPr/>
+          <p:nvPr/>
+        </p:nvSpPr>
+        <p:spPr>
+          <a:xfrm>
+            <a:off x="457200" y="713232"/>
+            <a:ext cx="11368735" cy="274320"/>
+          </a:xfrm>
+          <a:prstGeom prst="rect">
+            <a:avLst/>
+          </a:prstGeom>
+          <a:noFill/>
+          <a:ln/>
+        </p:spPr>
+        <p:txBody>
+          <a:bodyPr wrap="square" lIns="0" tIns="0" rIns="0" bIns="0" rtlCol="0" anchor="ctr"/>
+          <a:lstStyle/>
+          <a:p>
+            <a:pPr algn="r" indent="0" marL="0">
+              <a:buNone/>
+            </a:pPr>
+            <a:r>
+              <a:rPr lang="en-US" sz="1400" b="1" dirty="0">
+                <a:solidFill>
+                  <a:srgbClr val="1C3F6E"/>
+                </a:solidFill>
+                <a:latin typeface="Calibri" pitchFamily="34" charset="0"/>
+                <a:ea typeface="Calibri" pitchFamily="34" charset="-122"/>
+                <a:cs typeface="Calibri" pitchFamily="34" charset="-120"/>
+              </a:rPr>
               <a:t>BILINGUAL GAME</a:t>
             </a:r>
             <a:endParaRPr lang="en-US" sz="1400" dirty="0"/>
@@ -17324,7 +18005,7 @@
       </p:sp>
       <p:graphicFrame>
         <p:nvGraphicFramePr>
-          <p:cNvPr id="50" name="Table 0"/>
+          <p:cNvPr id="51" name="Table 0"/>
           <p:cNvGraphicFramePr>
             <a:graphicFrameLocks noGrp="1"/>
           </p:cNvGraphicFramePr>
@@ -18360,7 +19041,7 @@
             <a:pPr algn="ctr"/>
             <a:fld id="{F7021451-1387-4CA6-816F-3879F97B5CBC}" type="slidenum">
               <a:rPr b="1" lang="en-US"/>
-              <a:t>49</a:t>
+              <a:t>50</a:t>
             </a:fld>
             <a:endParaRPr lang="en-US"/>
           </a:p>
@@ -18374,9 +19055,9 @@
 </p:sld>
 </file>
 
-<file path=ppt/slides/slide5.xml><?xml version="1.0" encoding="utf-8"?>
+<file path=ppt/slides/slide51.xml><?xml version="1.0" encoding="utf-8"?>
 <p:sld xmlns:a="http://schemas.openxmlformats.org/drawingml/2006/main" xmlns:r="http://schemas.openxmlformats.org/officeDocument/2006/relationships" xmlns:p="http://schemas.openxmlformats.org/presentationml/2006/main">
-  <p:cSld name="Slide 5">
+  <p:cSld name="Slide 51">
     <p:spTree>
       <p:nvGrpSpPr>
         <p:cNvPr id="1" name=""/>
@@ -18424,225 +19105,6 @@
                 <a:ea typeface="Calibri" pitchFamily="34" charset="-122"/>
                 <a:cs typeface="Calibri" pitchFamily="34" charset="-120"/>
               </a:rPr>
-              <a:t>HOMEWORK CORRECTION</a:t>
-            </a:r>
-            <a:endParaRPr lang="en-US" sz="1400" dirty="0"/>
-          </a:p>
-        </p:txBody>
-      </p:sp>
-      <p:pic>
-        <p:nvPicPr>
-          <p:cNvPr id="3" name="Image 0" descr="/home/claude/f4/img/minesec_sheet.png">    </p:cNvPr>
-          <p:cNvPicPr>
-            <a:picLocks noChangeAspect="1"/>
-          </p:cNvPicPr>
-          <p:nvPr/>
-        </p:nvPicPr>
-        <p:blipFill>
-          <a:blip r:embed="rId1"/>
-          <a:stretch>
-            <a:fillRect/>
-          </a:stretch>
-        </p:blipFill>
-        <p:spPr>
-          <a:xfrm>
-            <a:off x="0" y="658368"/>
-            <a:ext cx="5120640" cy="5833872"/>
-          </a:xfrm>
-          <a:prstGeom prst="rect">
-            <a:avLst/>
-          </a:prstGeom>
-        </p:spPr>
-      </p:pic>
-      <p:sp>
-        <p:nvSpPr>
-          <p:cNvPr id="4" name="Text 1"/>
-          <p:cNvSpPr/>
-          <p:nvPr/>
-        </p:nvSpPr>
-        <p:spPr>
-          <a:xfrm>
-            <a:off x="5349240" y="1005840"/>
-            <a:ext cx="6522415" cy="731520"/>
-          </a:xfrm>
-          <a:prstGeom prst="rect">
-            <a:avLst/>
-          </a:prstGeom>
-          <a:noFill/>
-          <a:ln/>
-        </p:spPr>
-        <p:txBody>
-          <a:bodyPr wrap="square" lIns="0" tIns="0" rIns="0" bIns="0" rtlCol="0" anchor="ctr">
-            <a:normAutofit/>
-          </a:bodyPr>
-          <a:lstStyle/>
-          <a:p>
-            <a:pPr algn="ctr" indent="0" marL="0">
-              <a:buNone/>
-            </a:pPr>
-            <a:r>
-              <a:rPr lang="en-US" sz="3600" b="1" dirty="0">
-                <a:solidFill>
-                  <a:srgbClr val="990011"/>
-                </a:solidFill>
-                <a:latin typeface="Times New Roman" pitchFamily="34" charset="0"/>
-                <a:ea typeface="Times New Roman" pitchFamily="34" charset="-122"/>
-                <a:cs typeface="Times New Roman" pitchFamily="34" charset="-120"/>
-              </a:rPr>
-              <a:t>Correction: Possible Answer</a:t>
-            </a:r>
-            <a:endParaRPr lang="en-US" sz="3600" dirty="0"/>
-          </a:p>
-        </p:txBody>
-      </p:sp>
-      <p:sp>
-        <p:nvSpPr>
-          <p:cNvPr id="5" name="Text 2"/>
-          <p:cNvSpPr/>
-          <p:nvPr/>
-        </p:nvSpPr>
-        <p:spPr>
-          <a:xfrm>
-            <a:off x="5349240" y="1783080"/>
-            <a:ext cx="6522415" cy="4663440"/>
-          </a:xfrm>
-          <a:prstGeom prst="rect">
-            <a:avLst/>
-          </a:prstGeom>
-          <a:noFill/>
-          <a:ln/>
-        </p:spPr>
-        <p:txBody>
-          <a:bodyPr wrap="square" lIns="0" tIns="0" rIns="0" bIns="0" rtlCol="0" anchor="t"/>
-          <a:lstStyle/>
-          <a:p>
-            <a:pPr algn="l" indent="0" marL="0">
-              <a:spcAft>
-                <a:spcPts val="800"/>
-              </a:spcAft>
-              <a:buNone/>
-            </a:pPr>
-            <a:r>
-              <a:rPr lang="en-US" sz="4000" dirty="0">
-                <a:solidFill>
-                  <a:srgbClr val="111111"/>
-                </a:solidFill>
-                <a:latin typeface="Times New Roman" pitchFamily="34" charset="0"/>
-                <a:ea typeface="Times New Roman" pitchFamily="34" charset="-122"/>
-                <a:cs typeface="Times New Roman" pitchFamily="34" charset="-120"/>
-              </a:rPr>
-              <a:t>Faster and cheaper travel, more trade and lower prices, new shops and jobs along the road, but more accidents and speeding.</a:t>
-            </a:r>
-            <a:endParaRPr lang="en-US" sz="4000" dirty="0"/>
-          </a:p>
-        </p:txBody>
-      </p:sp>
-      <p:sp>
-        <p:nvSpPr>
-          <p:cNvPr id="25" name="Slide Number Placeholder 0"/>
-          <p:cNvSpPr>
-            <a:spLocks noGrp="1"/>
-          </p:cNvSpPr>
-          <p:nvPr>
-            <p:ph type="sldNum" sz="quarter" idx="4294967295"/>
-          </p:nvPr>
-        </p:nvSpPr>
-        <p:spPr>
-          <a:xfrm>
-            <a:off x="27432" y="91440"/>
-            <a:ext cx="585216" cy="475488"/>
-          </a:xfrm>
-          <a:prstGeom prst="rect">
-            <a:avLst/>
-          </a:prstGeom>
-          <a:extLst>
-            <a:ext uri="{C572A759-6A51-4108-AA02-DFA0A04FC94B}">
-              <ma14:wrappingTextBoxFlag xmlns:ma14="http://schemas.microsoft.com/office/mac/drawingml/2011/main" val="0"/>
-            </a:ext>
-          </a:extLst>
-        </p:spPr>
-        <p:txBody>
-          <a:bodyPr/>
-          <a:lstStyle>
-            <a:lvl1pPr>
-              <a:defRPr sz="2000">
-                <a:solidFill>
-                  <a:srgbClr val="FFFFFF"/>
-                </a:solidFill>
-                <a:latin typeface="Calibri"/>
-                <a:ea typeface="Calibri"/>
-                <a:cs typeface="Calibri"/>
-              </a:defRPr>
-            </a:lvl1pPr>
-          </a:lstStyle>
-          <a:p>
-            <a:pPr algn="ctr"/>
-            <a:fld id="{F7021451-1387-4CA6-816F-3879F97B5CBC}" type="slidenum">
-              <a:rPr b="1" lang="en-US"/>
-              <a:t>5</a:t>
-            </a:fld>
-            <a:endParaRPr lang="en-US"/>
-          </a:p>
-        </p:txBody>
-      </p:sp>
-    </p:spTree>
-  </p:cSld>
-  <p:clrMapOvr>
-    <a:masterClrMapping/>
-  </p:clrMapOvr>
-</p:sld>
-</file>
-
-<file path=ppt/slides/slide50.xml><?xml version="1.0" encoding="utf-8"?>
-<p:sld xmlns:a="http://schemas.openxmlformats.org/drawingml/2006/main" xmlns:r="http://schemas.openxmlformats.org/officeDocument/2006/relationships" xmlns:p="http://schemas.openxmlformats.org/presentationml/2006/main">
-  <p:cSld name="Slide 50">
-    <p:spTree>
-      <p:nvGrpSpPr>
-        <p:cNvPr id="1" name=""/>
-        <p:cNvGrpSpPr/>
-        <p:nvPr/>
-      </p:nvGrpSpPr>
-      <p:grpSpPr>
-        <a:xfrm>
-          <a:off x="0" y="0"/>
-          <a:ext cx="0" cy="0"/>
-          <a:chOff x="0" y="0"/>
-          <a:chExt cx="0" cy="0"/>
-        </a:xfrm>
-      </p:grpSpPr>
-      <p:sp>
-        <p:nvSpPr>
-          <p:cNvPr id="2" name="Text 0"/>
-          <p:cNvSpPr/>
-          <p:nvPr/>
-        </p:nvSpPr>
-        <p:spPr>
-          <a:xfrm>
-            <a:off x="457200" y="713232"/>
-            <a:ext cx="11368735" cy="274320"/>
-          </a:xfrm>
-          <a:prstGeom prst="rect">
-            <a:avLst/>
-          </a:prstGeom>
-          <a:noFill/>
-          <a:ln/>
-        </p:spPr>
-        <p:txBody>
-          <a:bodyPr wrap="square" lIns="0" tIns="0" rIns="0" bIns="0" rtlCol="0" anchor="ctr"/>
-          <a:lstStyle/>
-          <a:p>
-            <a:pPr algn="r" indent="0" marL="0">
-              <a:buNone/>
-            </a:pPr>
-            <a:r>
-              <a:rPr lang="en-US" sz="1400" b="1" dirty="0">
-                <a:solidFill>
-                  <a:srgbClr val="1C3F6E"/>
-                </a:solidFill>
-                <a:latin typeface="Calibri" pitchFamily="34" charset="0"/>
-                <a:ea typeface="Calibri" pitchFamily="34" charset="-122"/>
-                <a:cs typeface="Calibri" pitchFamily="34" charset="-120"/>
-              </a:rPr>
               <a:t>LOGBOOK</a:t>
             </a:r>
             <a:endParaRPr lang="en-US" sz="1400" dirty="0"/>
@@ -18690,7 +19152,7 @@
       </p:sp>
       <p:graphicFrame>
         <p:nvGraphicFramePr>
-          <p:cNvPr id="51" name="Table 0"/>
+          <p:cNvPr id="52" name="Table 0"/>
           <p:cNvGraphicFramePr>
             <a:graphicFrameLocks noGrp="1"/>
           </p:cNvGraphicFramePr>
@@ -19312,7 +19774,7 @@
             <a:pPr algn="ctr"/>
             <a:fld id="{F7021451-1387-4CA6-816F-3879F97B5CBC}" type="slidenum">
               <a:rPr b="1" lang="en-US"/>
-              <a:t>50</a:t>
+              <a:t>51</a:t>
             </a:fld>
             <a:endParaRPr lang="en-US"/>
           </a:p>
@@ -19326,9 +19788,9 @@
 </p:sld>
 </file>
 
-<file path=ppt/slides/slide51.xml><?xml version="1.0" encoding="utf-8"?>
+<file path=ppt/slides/slide52.xml><?xml version="1.0" encoding="utf-8"?>
 <p:sld xmlns:a="http://schemas.openxmlformats.org/drawingml/2006/main" xmlns:r="http://schemas.openxmlformats.org/officeDocument/2006/relationships" xmlns:p="http://schemas.openxmlformats.org/presentationml/2006/main">
-  <p:cSld name="Slide 51">
+  <p:cSld name="Slide 52">
     <p:spTree>
       <p:nvGrpSpPr>
         <p:cNvPr id="1" name=""/>
@@ -19423,7 +19885,7 @@
       </p:sp>
       <p:graphicFrame>
         <p:nvGraphicFramePr>
-          <p:cNvPr id="52" name="Table 0"/>
+          <p:cNvPr id="53" name="Table 0"/>
           <p:cNvGraphicFramePr>
             <a:graphicFrameLocks noGrp="1"/>
           </p:cNvGraphicFramePr>
@@ -19533,7 +19995,7 @@
                           <a:ea typeface="Calibri" pitchFamily="34" charset="-122"/>
                           <a:cs typeface="Calibri" pitchFamily="34" charset="-120"/>
                         </a:rPr>
-                        <a:t>Types of Air and Water Transport; Factors of Development; Advantages, Disadvantages and Impact.</a:t>
+                        <a:t>Types of Air and Water Transport; Factors of Development; Advantages and Disadvantages; Impact and Recent Developments.</a:t>
                       </a:r>
                       <a:endParaRPr lang="en-US" sz="1600" dirty="0">
                         <a:latin typeface="Calibri" charset="0"/>
@@ -20183,331 +20645,6 @@
             <a:pPr algn="ctr"/>
             <a:fld id="{F7021451-1387-4CA6-816F-3879F97B5CBC}" type="slidenum">
               <a:rPr b="1" lang="en-US"/>
-              <a:t>51</a:t>
-            </a:fld>
-            <a:endParaRPr lang="en-US"/>
-          </a:p>
-        </p:txBody>
-      </p:sp>
-    </p:spTree>
-  </p:cSld>
-  <p:clrMapOvr>
-    <a:masterClrMapping/>
-  </p:clrMapOvr>
-</p:sld>
-</file>
-
-<file path=ppt/slides/slide52.xml><?xml version="1.0" encoding="utf-8"?>
-<p:sld xmlns:a="http://schemas.openxmlformats.org/drawingml/2006/main" xmlns:r="http://schemas.openxmlformats.org/officeDocument/2006/relationships" xmlns:p="http://schemas.openxmlformats.org/presentationml/2006/main">
-  <p:cSld name="Slide 52">
-    <p:spTree>
-      <p:nvGrpSpPr>
-        <p:cNvPr id="1" name=""/>
-        <p:cNvGrpSpPr/>
-        <p:nvPr/>
-      </p:nvGrpSpPr>
-      <p:grpSpPr>
-        <a:xfrm>
-          <a:off x="0" y="0"/>
-          <a:ext cx="0" cy="0"/>
-          <a:chOff x="0" y="0"/>
-          <a:chExt cx="0" cy="0"/>
-        </a:xfrm>
-      </p:grpSpPr>
-      <p:sp>
-        <p:nvSpPr>
-          <p:cNvPr id="2" name="Text 0"/>
-          <p:cNvSpPr/>
-          <p:nvPr/>
-        </p:nvSpPr>
-        <p:spPr>
-          <a:xfrm>
-            <a:off x="457200" y="713232"/>
-            <a:ext cx="11368735" cy="274320"/>
-          </a:xfrm>
-          <a:prstGeom prst="rect">
-            <a:avLst/>
-          </a:prstGeom>
-          <a:noFill/>
-          <a:ln/>
-        </p:spPr>
-        <p:txBody>
-          <a:bodyPr wrap="square" lIns="0" tIns="0" rIns="0" bIns="0" rtlCol="0" anchor="ctr"/>
-          <a:lstStyle/>
-          <a:p>
-            <a:pPr algn="r" indent="0" marL="0">
-              <a:buNone/>
-            </a:pPr>
-            <a:r>
-              <a:rPr lang="en-US" sz="1400" b="1" dirty="0">
-                <a:solidFill>
-                  <a:srgbClr val="1C3F6E"/>
-                </a:solidFill>
-                <a:latin typeface="Calibri" pitchFamily="34" charset="0"/>
-                <a:ea typeface="Calibri" pitchFamily="34" charset="-122"/>
-                <a:cs typeface="Calibri" pitchFamily="34" charset="-120"/>
-              </a:rPr>
-              <a:t>TEACHER'S NOTE</a:t>
-            </a:r>
-            <a:endParaRPr lang="en-US" sz="1400" dirty="0"/>
-          </a:p>
-        </p:txBody>
-      </p:sp>
-      <p:pic>
-        <p:nvPicPr>
-          <p:cNvPr id="3" name="Image 0" descr="/home/claude/f4/img/minesec_sheet.png">    </p:cNvPr>
-          <p:cNvPicPr>
-            <a:picLocks noChangeAspect="1"/>
-          </p:cNvPicPr>
-          <p:nvPr/>
-        </p:nvPicPr>
-        <p:blipFill>
-          <a:blip r:embed="rId1"/>
-          <a:stretch>
-            <a:fillRect/>
-          </a:stretch>
-        </p:blipFill>
-        <p:spPr>
-          <a:xfrm>
-            <a:off x="0" y="658368"/>
-            <a:ext cx="5120640" cy="5833872"/>
-          </a:xfrm>
-          <a:prstGeom prst="rect">
-            <a:avLst/>
-          </a:prstGeom>
-        </p:spPr>
-      </p:pic>
-      <p:sp>
-        <p:nvSpPr>
-          <p:cNvPr id="4" name="Text 1"/>
-          <p:cNvSpPr/>
-          <p:nvPr/>
-        </p:nvSpPr>
-        <p:spPr>
-          <a:xfrm>
-            <a:off x="5349240" y="1005840"/>
-            <a:ext cx="6522415" cy="731520"/>
-          </a:xfrm>
-          <a:prstGeom prst="rect">
-            <a:avLst/>
-          </a:prstGeom>
-          <a:noFill/>
-          <a:ln/>
-        </p:spPr>
-        <p:txBody>
-          <a:bodyPr wrap="square" lIns="0" tIns="0" rIns="0" bIns="0" rtlCol="0" anchor="ctr">
-            <a:normAutofit/>
-          </a:bodyPr>
-          <a:lstStyle/>
-          <a:p>
-            <a:pPr algn="ctr" indent="0" marL="0">
-              <a:buNone/>
-            </a:pPr>
-            <a:r>
-              <a:rPr lang="en-US" sz="3600" b="1" dirty="0">
-                <a:solidFill>
-                  <a:srgbClr val="990011"/>
-                </a:solidFill>
-                <a:latin typeface="Times New Roman" pitchFamily="34" charset="0"/>
-                <a:ea typeface="Times New Roman" pitchFamily="34" charset="-122"/>
-                <a:cs typeface="Times New Roman" pitchFamily="34" charset="-120"/>
-              </a:rPr>
-              <a:t>Teacher's Note</a:t>
-            </a:r>
-            <a:endParaRPr lang="en-US" sz="3600" dirty="0"/>
-          </a:p>
-        </p:txBody>
-      </p:sp>
-      <p:sp>
-        <p:nvSpPr>
-          <p:cNvPr id="5" name="Text 2"/>
-          <p:cNvSpPr/>
-          <p:nvPr/>
-        </p:nvSpPr>
-        <p:spPr>
-          <a:xfrm>
-            <a:off x="5349240" y="1783080"/>
-            <a:ext cx="6522415" cy="4663440"/>
-          </a:xfrm>
-          <a:prstGeom prst="rect">
-            <a:avLst/>
-          </a:prstGeom>
-          <a:noFill/>
-          <a:ln/>
-        </p:spPr>
-        <p:txBody>
-          <a:bodyPr wrap="square" lIns="0" tIns="0" rIns="0" bIns="0" rtlCol="0" anchor="t"/>
-          <a:lstStyle/>
-          <a:p>
-            <a:pPr algn="l" marL="342900" indent="-342900">
-              <a:spcAft>
-                <a:spcPts val="800"/>
-              </a:spcAft>
-              <a:buSzPct val="100000"/>
-              <a:buChar char="•"/>
-            </a:pPr>
-            <a:r>
-              <a:rPr lang="en-US" sz="2000" dirty="0">
-                <a:solidFill>
-                  <a:srgbClr val="111111"/>
-                </a:solidFill>
-                <a:latin typeface="Calibri" pitchFamily="34" charset="0"/>
-                <a:ea typeface="Calibri" pitchFamily="34" charset="-122"/>
-                <a:cs typeface="Calibri" pitchFamily="34" charset="-120"/>
-              </a:rPr>
-              <a:t>Timing: Homework correction, plan, objectives 8 min | Recall, situation, action 10 min | 5 activities 30 min | Board summary (copying) 30 min | Evaluation, remediation 10 min | Homework, next lesson 5 min | Logbook 7 min</a:t>
-            </a:r>
-            <a:endParaRPr lang="en-US" sz="2000" dirty="0"/>
-          </a:p>
-          <a:p>
-            <a:pPr algn="l" marL="342900" indent="-342900">
-              <a:spcAft>
-                <a:spcPts val="800"/>
-              </a:spcAft>
-              <a:buSzPct val="100000"/>
-              <a:buChar char="•"/>
-            </a:pPr>
-            <a:r>
-              <a:rPr lang="en-US" sz="2000" dirty="0">
-                <a:solidFill>
-                  <a:srgbClr val="111111"/>
-                </a:solidFill>
-                <a:latin typeface="Calibri" pitchFamily="34" charset="0"/>
-                <a:ea typeface="Calibri" pitchFamily="34" charset="-122"/>
-                <a:cs typeface="Calibri" pitchFamily="34" charset="-120"/>
-              </a:rPr>
-              <a:t>Without the projector (Activity 1): name ships.</a:t>
-            </a:r>
-            <a:endParaRPr lang="en-US" sz="2000" dirty="0"/>
-          </a:p>
-          <a:p>
-            <a:pPr algn="l" marL="342900" indent="-342900">
-              <a:spcAft>
-                <a:spcPts val="800"/>
-              </a:spcAft>
-              <a:buSzPct val="100000"/>
-              <a:buChar char="•"/>
-            </a:pPr>
-            <a:r>
-              <a:rPr lang="en-US" sz="2000" dirty="0">
-                <a:solidFill>
-                  <a:srgbClr val="111111"/>
-                </a:solidFill>
-                <a:latin typeface="Calibri" pitchFamily="34" charset="0"/>
-                <a:ea typeface="Calibri" pitchFamily="34" charset="-122"/>
-                <a:cs typeface="Calibri" pitchFamily="34" charset="-120"/>
-              </a:rPr>
-              <a:t>Without the projector (Activity 2): name navigable rivers.</a:t>
-            </a:r>
-            <a:endParaRPr lang="en-US" sz="2000" dirty="0"/>
-          </a:p>
-          <a:p>
-            <a:pPr algn="l" marL="342900" indent="-342900">
-              <a:spcAft>
-                <a:spcPts val="800"/>
-              </a:spcAft>
-              <a:buSzPct val="100000"/>
-              <a:buChar char="•"/>
-            </a:pPr>
-            <a:r>
-              <a:rPr lang="en-US" sz="2000" dirty="0">
-                <a:solidFill>
-                  <a:srgbClr val="111111"/>
-                </a:solidFill>
-                <a:latin typeface="Calibri" pitchFamily="34" charset="0"/>
-                <a:ea typeface="Calibri" pitchFamily="34" charset="-122"/>
-                <a:cs typeface="Calibri" pitchFamily="34" charset="-120"/>
-              </a:rPr>
-              <a:t>Without the projector (Activity 3): name airports.</a:t>
-            </a:r>
-            <a:endParaRPr lang="en-US" sz="2000" dirty="0"/>
-          </a:p>
-          <a:p>
-            <a:pPr algn="l" marL="342900" indent="-342900">
-              <a:spcAft>
-                <a:spcPts val="800"/>
-              </a:spcAft>
-              <a:buSzPct val="100000"/>
-              <a:buChar char="•"/>
-            </a:pPr>
-            <a:r>
-              <a:rPr lang="en-US" sz="2000" dirty="0">
-                <a:solidFill>
-                  <a:srgbClr val="111111"/>
-                </a:solidFill>
-                <a:latin typeface="Calibri" pitchFamily="34" charset="0"/>
-                <a:ea typeface="Calibri" pitchFamily="34" charset="-122"/>
-                <a:cs typeface="Calibri" pitchFamily="34" charset="-120"/>
-              </a:rPr>
-              <a:t>Without the projector (Activity 4): discuss.</a:t>
-            </a:r>
-            <a:endParaRPr lang="en-US" sz="2000" dirty="0"/>
-          </a:p>
-          <a:p>
-            <a:pPr algn="l" marL="342900" indent="-342900">
-              <a:spcAft>
-                <a:spcPts val="800"/>
-              </a:spcAft>
-              <a:buSzPct val="100000"/>
-              <a:buChar char="•"/>
-            </a:pPr>
-            <a:r>
-              <a:rPr lang="en-US" sz="2000" dirty="0">
-                <a:solidFill>
-                  <a:srgbClr val="111111"/>
-                </a:solidFill>
-                <a:latin typeface="Calibri" pitchFamily="34" charset="0"/>
-                <a:ea typeface="Calibri" pitchFamily="34" charset="-122"/>
-                <a:cs typeface="Calibri" pitchFamily="34" charset="-120"/>
-              </a:rPr>
-              <a:t>Without the projector (Activity 5): compare.</a:t>
-            </a:r>
-            <a:endParaRPr lang="en-US" sz="2000" dirty="0"/>
-          </a:p>
-        </p:txBody>
-      </p:sp>
-      <p:sp>
-        <p:nvSpPr>
-          <p:cNvPr id="25" name="Slide Number Placeholder 0"/>
-          <p:cNvSpPr>
-            <a:spLocks noGrp="1"/>
-          </p:cNvSpPr>
-          <p:nvPr>
-            <p:ph type="sldNum" sz="quarter" idx="4294967295"/>
-          </p:nvPr>
-        </p:nvSpPr>
-        <p:spPr>
-          <a:xfrm>
-            <a:off x="27432" y="91440"/>
-            <a:ext cx="585216" cy="475488"/>
-          </a:xfrm>
-          <a:prstGeom prst="rect">
-            <a:avLst/>
-          </a:prstGeom>
-          <a:extLst>
-            <a:ext uri="{C572A759-6A51-4108-AA02-DFA0A04FC94B}">
-              <ma14:wrappingTextBoxFlag xmlns:ma14="http://schemas.microsoft.com/office/mac/drawingml/2011/main" val="0"/>
-            </a:ext>
-          </a:extLst>
-        </p:spPr>
-        <p:txBody>
-          <a:bodyPr/>
-          <a:lstStyle>
-            <a:lvl1pPr>
-              <a:defRPr sz="2000">
-                <a:solidFill>
-                  <a:srgbClr val="FFFFFF"/>
-                </a:solidFill>
-                <a:latin typeface="Calibri"/>
-                <a:ea typeface="Calibri"/>
-                <a:cs typeface="Calibri"/>
-              </a:defRPr>
-            </a:lvl1pPr>
-          </a:lstStyle>
-          <a:p>
-            <a:pPr algn="ctr"/>
-            <a:fld id="{F7021451-1387-4CA6-816F-3879F97B5CBC}" type="slidenum">
-              <a:rPr b="1" lang="en-US"/>
               <a:t>52</a:t>
             </a:fld>
             <a:endParaRPr lang="en-US"/>
@@ -20572,7 +20709,7 @@
                 <a:ea typeface="Calibri" pitchFamily="34" charset="-122"/>
                 <a:cs typeface="Calibri" pitchFamily="34" charset="-120"/>
               </a:rPr>
-              <a:t>REFERENCES</a:t>
+              <a:t>TEACHER'S NOTE</a:t>
             </a:r>
             <a:endParaRPr lang="en-US" sz="1400" dirty="0"/>
           </a:p>
@@ -20595,7 +20732,7 @@
         <p:spPr>
           <a:xfrm>
             <a:off x="0" y="658368"/>
-            <a:ext cx="3840480" cy="5833872"/>
+            <a:ext cx="5120640" cy="5833872"/>
           </a:xfrm>
           <a:prstGeom prst="rect">
             <a:avLst/>
@@ -20610,8 +20747,8 @@
         </p:nvSpPr>
         <p:spPr>
           <a:xfrm>
-            <a:off x="4069080" y="1005840"/>
-            <a:ext cx="7802575" cy="731520"/>
+            <a:off x="5349240" y="1005840"/>
+            <a:ext cx="6522415" cy="731520"/>
           </a:xfrm>
           <a:prstGeom prst="rect">
             <a:avLst/>
@@ -20637,7 +20774,7 @@
                 <a:ea typeface="Times New Roman" pitchFamily="34" charset="-122"/>
                 <a:cs typeface="Times New Roman" pitchFamily="34" charset="-120"/>
               </a:rPr>
-              <a:t>References</a:t>
+              <a:t>Teacher's Note</a:t>
             </a:r>
             <a:endParaRPr lang="en-US" sz="3600" dirty="0"/>
           </a:p>
@@ -20651,8 +20788,8 @@
         </p:nvSpPr>
         <p:spPr>
           <a:xfrm>
-            <a:off x="4069080" y="1783080"/>
-            <a:ext cx="7802575" cy="4663440"/>
+            <a:off x="5349240" y="1783080"/>
+            <a:ext cx="6522415" cy="4663440"/>
           </a:xfrm>
           <a:prstGeom prst="rect">
             <a:avLst/>
@@ -20672,7 +20809,7 @@
               <a:buChar char="•"/>
             </a:pPr>
             <a:r>
-              <a:rPr lang="en-US" sz="1800" dirty="0">
+              <a:rPr lang="en-US" sz="2000" dirty="0">
                 <a:solidFill>
                   <a:srgbClr val="111111"/>
                 </a:solidFill>
@@ -20680,9 +20817,9 @@
                 <a:ea typeface="Calibri" pitchFamily="34" charset="-122"/>
                 <a:cs typeface="Calibri" pitchFamily="34" charset="-120"/>
               </a:rPr>
-              <a:t>Geography Syllabus, Forms I–V, MINESEC (2023) — Form 5, Module I: Management of Manufacturing and Tertiary Activities.</a:t>
-            </a:r>
-            <a:endParaRPr lang="en-US" sz="1800" dirty="0"/>
+              <a:t>Timing: Homework correction, plan, objectives 8 min | Recall, situation, action 10 min | 5 activities 30 min | Board summary (copying) 30 min | Evaluation, remediation 10 min | Homework, next lesson 5 min | Logbook 7 min</a:t>
+            </a:r>
+            <a:endParaRPr lang="en-US" sz="2000" dirty="0"/>
           </a:p>
           <a:p>
             <a:pPr algn="l" marL="342900" indent="-342900">
@@ -20693,7 +20830,7 @@
               <a:buChar char="•"/>
             </a:pPr>
             <a:r>
-              <a:rPr lang="en-US" sz="1800" dirty="0">
+              <a:rPr lang="en-US" sz="2000" dirty="0">
                 <a:solidFill>
                   <a:srgbClr val="111111"/>
                 </a:solidFill>
@@ -20701,9 +20838,9 @@
                 <a:ea typeface="Calibri" pitchFamily="34" charset="-122"/>
                 <a:cs typeface="Calibri" pitchFamily="34" charset="-120"/>
               </a:rPr>
-              <a:t>Photo, Activity 1: “JAXPORT Welcomes Largest Container Ship To Date” by JAXPORT, CC BY-NC 2.0, via Flickr (https://www.flickr.com/photos/24847875@N05/17069054628)</a:t>
-            </a:r>
-            <a:endParaRPr lang="en-US" sz="1800" dirty="0"/>
+              <a:t>Without the projector (Activity 1): name ships.</a:t>
+            </a:r>
+            <a:endParaRPr lang="en-US" sz="2000" dirty="0"/>
           </a:p>
           <a:p>
             <a:pPr algn="l" marL="342900" indent="-342900">
@@ -20714,7 +20851,7 @@
               <a:buChar char="•"/>
             </a:pPr>
             <a:r>
-              <a:rPr lang="en-US" sz="1800" dirty="0">
+              <a:rPr lang="en-US" sz="2000" dirty="0">
                 <a:solidFill>
                   <a:srgbClr val="111111"/>
                 </a:solidFill>
@@ -20722,9 +20859,9 @@
                 <a:ea typeface="Calibri" pitchFamily="34" charset="-122"/>
                 <a:cs typeface="Calibri" pitchFamily="34" charset="-120"/>
               </a:rPr>
-              <a:t>Photo, Activity 2: “Cargo handling facilities, Calumet River” by UIC Library Digital Collections, CC BY-NC-SA 2.0, via Flickr (https://www.flickr.com/photos/34893859@N05/7979987843)</a:t>
-            </a:r>
-            <a:endParaRPr lang="en-US" sz="1800" dirty="0"/>
+              <a:t>Without the projector (Activity 2): name navigable rivers.</a:t>
+            </a:r>
+            <a:endParaRPr lang="en-US" sz="2000" dirty="0"/>
           </a:p>
           <a:p>
             <a:pPr algn="l" marL="342900" indent="-342900">
@@ -20735,7 +20872,7 @@
               <a:buChar char="•"/>
             </a:pPr>
             <a:r>
-              <a:rPr lang="en-US" sz="1800" dirty="0">
+              <a:rPr lang="en-US" sz="2000" dirty="0">
                 <a:solidFill>
                   <a:srgbClr val="111111"/>
                 </a:solidFill>
@@ -20743,9 +20880,9 @@
                 <a:ea typeface="Calibri" pitchFamily="34" charset="-122"/>
                 <a:cs typeface="Calibri" pitchFamily="34" charset="-120"/>
               </a:rPr>
-              <a:t>Photo, Activity 3: “Olympic Airlines A340-313X 'Epidauros'” by caribb, CC BY-NC-ND 2.0, via Flickr (https://www.flickr.com/photos/87857621@N00/194965684)</a:t>
-            </a:r>
-            <a:endParaRPr lang="en-US" sz="1800" dirty="0"/>
+              <a:t>Without the projector (Activity 3): name airports.</a:t>
+            </a:r>
+            <a:endParaRPr lang="en-US" sz="2000" dirty="0"/>
           </a:p>
           <a:p>
             <a:pPr algn="l" marL="342900" indent="-342900">
@@ -20756,7 +20893,7 @@
               <a:buChar char="•"/>
             </a:pPr>
             <a:r>
-              <a:rPr lang="en-US" sz="1800" dirty="0">
+              <a:rPr lang="en-US" sz="2000" dirty="0">
                 <a:solidFill>
                   <a:srgbClr val="111111"/>
                 </a:solidFill>
@@ -20764,9 +20901,9 @@
                 <a:ea typeface="Calibri" pitchFamily="34" charset="-122"/>
                 <a:cs typeface="Calibri" pitchFamily="34" charset="-120"/>
               </a:rPr>
-              <a:t>Photo, Activity 4: “Airplane” by jeffk, CC BY 2.0, via Flickr (https://www.flickr.com/photos/44124372247@N01/59597563)</a:t>
-            </a:r>
-            <a:endParaRPr lang="en-US" sz="1800" dirty="0"/>
+              <a:t>Without the projector (Activity 4): discuss.</a:t>
+            </a:r>
+            <a:endParaRPr lang="en-US" sz="2000" dirty="0"/>
           </a:p>
           <a:p>
             <a:pPr algn="l" marL="342900" indent="-342900">
@@ -20777,7 +20914,7 @@
               <a:buChar char="•"/>
             </a:pPr>
             <a:r>
-              <a:rPr lang="en-US" sz="1800" dirty="0">
+              <a:rPr lang="en-US" sz="2000" dirty="0">
                 <a:solidFill>
                   <a:srgbClr val="111111"/>
                 </a:solidFill>
@@ -20785,9 +20922,9 @@
                 <a:ea typeface="Calibri" pitchFamily="34" charset="-122"/>
                 <a:cs typeface="Calibri" pitchFamily="34" charset="-120"/>
               </a:rPr>
-              <a:t>Diagrams and animations: drawn for this lesson (Geography Department).</a:t>
-            </a:r>
-            <a:endParaRPr lang="en-US" sz="1800" dirty="0"/>
+              <a:t>Without the projector (Activity 5): compare.</a:t>
+            </a:r>
+            <a:endParaRPr lang="en-US" sz="2000" dirty="0"/>
           </a:p>
         </p:txBody>
       </p:sp>
@@ -20834,6 +20971,331 @@
             <a:fld id="{F7021451-1387-4CA6-816F-3879F97B5CBC}" type="slidenum">
               <a:rPr b="1" lang="en-US"/>
               <a:t>53</a:t>
+            </a:fld>
+            <a:endParaRPr lang="en-US"/>
+          </a:p>
+        </p:txBody>
+      </p:sp>
+    </p:spTree>
+  </p:cSld>
+  <p:clrMapOvr>
+    <a:masterClrMapping/>
+  </p:clrMapOvr>
+</p:sld>
+</file>
+
+<file path=ppt/slides/slide54.xml><?xml version="1.0" encoding="utf-8"?>
+<p:sld xmlns:a="http://schemas.openxmlformats.org/drawingml/2006/main" xmlns:r="http://schemas.openxmlformats.org/officeDocument/2006/relationships" xmlns:p="http://schemas.openxmlformats.org/presentationml/2006/main">
+  <p:cSld name="Slide 54">
+    <p:spTree>
+      <p:nvGrpSpPr>
+        <p:cNvPr id="1" name=""/>
+        <p:cNvGrpSpPr/>
+        <p:nvPr/>
+      </p:nvGrpSpPr>
+      <p:grpSpPr>
+        <a:xfrm>
+          <a:off x="0" y="0"/>
+          <a:ext cx="0" cy="0"/>
+          <a:chOff x="0" y="0"/>
+          <a:chExt cx="0" cy="0"/>
+        </a:xfrm>
+      </p:grpSpPr>
+      <p:sp>
+        <p:nvSpPr>
+          <p:cNvPr id="2" name="Text 0"/>
+          <p:cNvSpPr/>
+          <p:nvPr/>
+        </p:nvSpPr>
+        <p:spPr>
+          <a:xfrm>
+            <a:off x="457200" y="713232"/>
+            <a:ext cx="11368735" cy="274320"/>
+          </a:xfrm>
+          <a:prstGeom prst="rect">
+            <a:avLst/>
+          </a:prstGeom>
+          <a:noFill/>
+          <a:ln/>
+        </p:spPr>
+        <p:txBody>
+          <a:bodyPr wrap="square" lIns="0" tIns="0" rIns="0" bIns="0" rtlCol="0" anchor="ctr"/>
+          <a:lstStyle/>
+          <a:p>
+            <a:pPr algn="r" indent="0" marL="0">
+              <a:buNone/>
+            </a:pPr>
+            <a:r>
+              <a:rPr lang="en-US" sz="1400" b="1" dirty="0">
+                <a:solidFill>
+                  <a:srgbClr val="1C3F6E"/>
+                </a:solidFill>
+                <a:latin typeface="Calibri" pitchFamily="34" charset="0"/>
+                <a:ea typeface="Calibri" pitchFamily="34" charset="-122"/>
+                <a:cs typeface="Calibri" pitchFamily="34" charset="-120"/>
+              </a:rPr>
+              <a:t>REFERENCES</a:t>
+            </a:r>
+            <a:endParaRPr lang="en-US" sz="1400" dirty="0"/>
+          </a:p>
+        </p:txBody>
+      </p:sp>
+      <p:pic>
+        <p:nvPicPr>
+          <p:cNvPr id="3" name="Image 0" descr="/home/claude/f4/img/minesec_sheet.png">    </p:cNvPr>
+          <p:cNvPicPr>
+            <a:picLocks noChangeAspect="1"/>
+          </p:cNvPicPr>
+          <p:nvPr/>
+        </p:nvPicPr>
+        <p:blipFill>
+          <a:blip r:embed="rId1"/>
+          <a:stretch>
+            <a:fillRect/>
+          </a:stretch>
+        </p:blipFill>
+        <p:spPr>
+          <a:xfrm>
+            <a:off x="0" y="658368"/>
+            <a:ext cx="3840480" cy="5833872"/>
+          </a:xfrm>
+          <a:prstGeom prst="rect">
+            <a:avLst/>
+          </a:prstGeom>
+        </p:spPr>
+      </p:pic>
+      <p:sp>
+        <p:nvSpPr>
+          <p:cNvPr id="4" name="Text 1"/>
+          <p:cNvSpPr/>
+          <p:nvPr/>
+        </p:nvSpPr>
+        <p:spPr>
+          <a:xfrm>
+            <a:off x="4069080" y="1005840"/>
+            <a:ext cx="7802575" cy="731520"/>
+          </a:xfrm>
+          <a:prstGeom prst="rect">
+            <a:avLst/>
+          </a:prstGeom>
+          <a:noFill/>
+          <a:ln/>
+        </p:spPr>
+        <p:txBody>
+          <a:bodyPr wrap="square" lIns="0" tIns="0" rIns="0" bIns="0" rtlCol="0" anchor="ctr">
+            <a:normAutofit/>
+          </a:bodyPr>
+          <a:lstStyle/>
+          <a:p>
+            <a:pPr algn="ctr" indent="0" marL="0">
+              <a:buNone/>
+            </a:pPr>
+            <a:r>
+              <a:rPr lang="en-US" sz="3600" b="1" dirty="0">
+                <a:solidFill>
+                  <a:srgbClr val="990011"/>
+                </a:solidFill>
+                <a:latin typeface="Times New Roman" pitchFamily="34" charset="0"/>
+                <a:ea typeface="Times New Roman" pitchFamily="34" charset="-122"/>
+                <a:cs typeface="Times New Roman" pitchFamily="34" charset="-120"/>
+              </a:rPr>
+              <a:t>References</a:t>
+            </a:r>
+            <a:endParaRPr lang="en-US" sz="3600" dirty="0"/>
+          </a:p>
+        </p:txBody>
+      </p:sp>
+      <p:sp>
+        <p:nvSpPr>
+          <p:cNvPr id="5" name="Text 2"/>
+          <p:cNvSpPr/>
+          <p:nvPr/>
+        </p:nvSpPr>
+        <p:spPr>
+          <a:xfrm>
+            <a:off x="4069080" y="1783080"/>
+            <a:ext cx="7802575" cy="4663440"/>
+          </a:xfrm>
+          <a:prstGeom prst="rect">
+            <a:avLst/>
+          </a:prstGeom>
+          <a:noFill/>
+          <a:ln/>
+        </p:spPr>
+        <p:txBody>
+          <a:bodyPr wrap="square" lIns="0" tIns="0" rIns="0" bIns="0" rtlCol="0" anchor="t"/>
+          <a:lstStyle/>
+          <a:p>
+            <a:pPr algn="l" marL="342900" indent="-342900">
+              <a:spcAft>
+                <a:spcPts val="800"/>
+              </a:spcAft>
+              <a:buSzPct val="100000"/>
+              <a:buChar char="•"/>
+            </a:pPr>
+            <a:r>
+              <a:rPr lang="en-US" sz="1800" dirty="0">
+                <a:solidFill>
+                  <a:srgbClr val="111111"/>
+                </a:solidFill>
+                <a:latin typeface="Calibri" pitchFamily="34" charset="0"/>
+                <a:ea typeface="Calibri" pitchFamily="34" charset="-122"/>
+                <a:cs typeface="Calibri" pitchFamily="34" charset="-120"/>
+              </a:rPr>
+              <a:t>Geography Syllabus, Forms I–V, MINESEC (2023) — Form 5, Module I: Management of Manufacturing and Tertiary Activities.</a:t>
+            </a:r>
+            <a:endParaRPr lang="en-US" sz="1800" dirty="0"/>
+          </a:p>
+          <a:p>
+            <a:pPr algn="l" marL="342900" indent="-342900">
+              <a:spcAft>
+                <a:spcPts val="800"/>
+              </a:spcAft>
+              <a:buSzPct val="100000"/>
+              <a:buChar char="•"/>
+            </a:pPr>
+            <a:r>
+              <a:rPr lang="en-US" sz="1800" dirty="0">
+                <a:solidFill>
+                  <a:srgbClr val="111111"/>
+                </a:solidFill>
+                <a:latin typeface="Calibri" pitchFamily="34" charset="0"/>
+                <a:ea typeface="Calibri" pitchFamily="34" charset="-122"/>
+                <a:cs typeface="Calibri" pitchFamily="34" charset="-120"/>
+              </a:rPr>
+              <a:t>Photo, Activity 1: “JAXPORT Welcomes Largest Container Ship To Date” by JAXPORT, CC BY-NC 2.0, via Flickr (https://www.flickr.com/photos/24847875@N05/17069054628)</a:t>
+            </a:r>
+            <a:endParaRPr lang="en-US" sz="1800" dirty="0"/>
+          </a:p>
+          <a:p>
+            <a:pPr algn="l" marL="342900" indent="-342900">
+              <a:spcAft>
+                <a:spcPts val="800"/>
+              </a:spcAft>
+              <a:buSzPct val="100000"/>
+              <a:buChar char="•"/>
+            </a:pPr>
+            <a:r>
+              <a:rPr lang="en-US" sz="1800" dirty="0">
+                <a:solidFill>
+                  <a:srgbClr val="111111"/>
+                </a:solidFill>
+                <a:latin typeface="Calibri" pitchFamily="34" charset="0"/>
+                <a:ea typeface="Calibri" pitchFamily="34" charset="-122"/>
+                <a:cs typeface="Calibri" pitchFamily="34" charset="-120"/>
+              </a:rPr>
+              <a:t>Photo, Activity 2: “Cargo handling facilities, Calumet River” by UIC Library Digital Collections, CC BY-NC-SA 2.0, via Flickr (https://www.flickr.com/photos/34893859@N05/7979987843)</a:t>
+            </a:r>
+            <a:endParaRPr lang="en-US" sz="1800" dirty="0"/>
+          </a:p>
+          <a:p>
+            <a:pPr algn="l" marL="342900" indent="-342900">
+              <a:spcAft>
+                <a:spcPts val="800"/>
+              </a:spcAft>
+              <a:buSzPct val="100000"/>
+              <a:buChar char="•"/>
+            </a:pPr>
+            <a:r>
+              <a:rPr lang="en-US" sz="1800" dirty="0">
+                <a:solidFill>
+                  <a:srgbClr val="111111"/>
+                </a:solidFill>
+                <a:latin typeface="Calibri" pitchFamily="34" charset="0"/>
+                <a:ea typeface="Calibri" pitchFamily="34" charset="-122"/>
+                <a:cs typeface="Calibri" pitchFamily="34" charset="-120"/>
+              </a:rPr>
+              <a:t>Photo, Activity 3: “Olympic Airlines A340-313X 'Epidauros'” by caribb, CC BY-NC-ND 2.0, via Flickr (https://www.flickr.com/photos/87857621@N00/194965684)</a:t>
+            </a:r>
+            <a:endParaRPr lang="en-US" sz="1800" dirty="0"/>
+          </a:p>
+          <a:p>
+            <a:pPr algn="l" marL="342900" indent="-342900">
+              <a:spcAft>
+                <a:spcPts val="800"/>
+              </a:spcAft>
+              <a:buSzPct val="100000"/>
+              <a:buChar char="•"/>
+            </a:pPr>
+            <a:r>
+              <a:rPr lang="en-US" sz="1800" dirty="0">
+                <a:solidFill>
+                  <a:srgbClr val="111111"/>
+                </a:solidFill>
+                <a:latin typeface="Calibri" pitchFamily="34" charset="0"/>
+                <a:ea typeface="Calibri" pitchFamily="34" charset="-122"/>
+                <a:cs typeface="Calibri" pitchFamily="34" charset="-120"/>
+              </a:rPr>
+              <a:t>Photo, Activity 4: “Airplane” by jeffk, CC BY 2.0, via Flickr (https://www.flickr.com/photos/44124372247@N01/59597563)</a:t>
+            </a:r>
+            <a:endParaRPr lang="en-US" sz="1800" dirty="0"/>
+          </a:p>
+          <a:p>
+            <a:pPr algn="l" marL="342900" indent="-342900">
+              <a:spcAft>
+                <a:spcPts val="800"/>
+              </a:spcAft>
+              <a:buSzPct val="100000"/>
+              <a:buChar char="•"/>
+            </a:pPr>
+            <a:r>
+              <a:rPr lang="en-US" sz="1800" dirty="0">
+                <a:solidFill>
+                  <a:srgbClr val="111111"/>
+                </a:solidFill>
+                <a:latin typeface="Calibri" pitchFamily="34" charset="0"/>
+                <a:ea typeface="Calibri" pitchFamily="34" charset="-122"/>
+                <a:cs typeface="Calibri" pitchFamily="34" charset="-120"/>
+              </a:rPr>
+              <a:t>Diagrams and animations: drawn for this lesson (Geography Department).</a:t>
+            </a:r>
+            <a:endParaRPr lang="en-US" sz="1800" dirty="0"/>
+          </a:p>
+        </p:txBody>
+      </p:sp>
+      <p:sp>
+        <p:nvSpPr>
+          <p:cNvPr id="25" name="Slide Number Placeholder 0"/>
+          <p:cNvSpPr>
+            <a:spLocks noGrp="1"/>
+          </p:cNvSpPr>
+          <p:nvPr>
+            <p:ph type="sldNum" sz="quarter" idx="4294967295"/>
+          </p:nvPr>
+        </p:nvSpPr>
+        <p:spPr>
+          <a:xfrm>
+            <a:off x="27432" y="91440"/>
+            <a:ext cx="585216" cy="475488"/>
+          </a:xfrm>
+          <a:prstGeom prst="rect">
+            <a:avLst/>
+          </a:prstGeom>
+          <a:extLst>
+            <a:ext uri="{C572A759-6A51-4108-AA02-DFA0A04FC94B}">
+              <ma14:wrappingTextBoxFlag xmlns:ma14="http://schemas.microsoft.com/office/mac/drawingml/2011/main" val="0"/>
+            </a:ext>
+          </a:extLst>
+        </p:spPr>
+        <p:txBody>
+          <a:bodyPr/>
+          <a:lstStyle>
+            <a:lvl1pPr>
+              <a:defRPr sz="2000">
+                <a:solidFill>
+                  <a:srgbClr val="FFFFFF"/>
+                </a:solidFill>
+                <a:latin typeface="Calibri"/>
+                <a:ea typeface="Calibri"/>
+                <a:cs typeface="Calibri"/>
+              </a:defRPr>
+            </a:lvl1pPr>
+          </a:lstStyle>
+          <a:p>
+            <a:pPr algn="ctr"/>
+            <a:fld id="{F7021451-1387-4CA6-816F-3879F97B5CBC}" type="slidenum">
+              <a:rPr b="1" lang="en-US"/>
+              <a:t>54</a:t>
             </a:fld>
             <a:endParaRPr lang="en-US"/>
           </a:p>
